--- a/lessons/6-5/slides.pptx
+++ b/lessons/6-5/slides.pptx
@@ -10925,7 +10925,7 @@
       </p:sp>
       <p:sp>
         <p:nvSpPr>
-          <p:cNvPr id="20" name="Shape 18"/>
+          <p:cNvPr id="20" name="Text 18"/>
           <p:cNvSpPr/>
           <p:nvPr/>
         </p:nvSpPr>
@@ -10946,33 +10946,7 @@
             <a:solidFill>
               <a:srgbClr val="D6DBDF"/>
             </a:solidFill>
-            <a:prstDash val="solid"/>
           </a:ln>
-          <a:effectLst>
-            <a:outerShdw sx="100000" sy="100000" kx="0" ky="0" algn="bl" rotWithShape="0" blurRad="50800" dist="12700" dir="5400000">
-              <a:srgbClr val="1C2E42">
-                <a:alpha val="10000"/>
-              </a:srgbClr>
-            </a:outerShdw>
-          </a:effectLst>
-        </p:spPr>
-      </p:sp>
-      <p:sp>
-        <p:nvSpPr>
-          <p:cNvPr id="21" name="Text 19"/>
-          <p:cNvSpPr/>
-          <p:nvPr/>
-        </p:nvSpPr>
-        <p:spPr>
-          <a:xfrm>
-            <a:off x="685800" y="1481328"/>
-            <a:ext cx="1447800" cy="384048"/>
-          </a:xfrm>
-          <a:prstGeom prst="rect">
-            <a:avLst/>
-          </a:prstGeom>
-          <a:noFill/>
-          <a:ln/>
         </p:spPr>
         <p:txBody>
           <a:bodyPr wrap="square" rtlCol="0" anchor="ctr"/>
@@ -10982,7 +10956,7 @@
               <a:buNone/>
             </a:pPr>
             <a:r>
-              <a:rPr lang="en-US" sz="900" dirty="0">
+              <a:rPr lang="en-US" sz="900" b="1" dirty="0">
                 <a:solidFill>
                   <a:srgbClr val="17324D"/>
                 </a:solidFill>
@@ -10998,7 +10972,7 @@
       </p:sp>
       <p:sp>
         <p:nvSpPr>
-          <p:cNvPr id="22" name="Shape 20"/>
+          <p:cNvPr id="21" name="Text 19"/>
           <p:cNvSpPr/>
           <p:nvPr/>
         </p:nvSpPr>
@@ -11019,33 +10993,7 @@
             <a:solidFill>
               <a:srgbClr val="D6DBDF"/>
             </a:solidFill>
-            <a:prstDash val="solid"/>
           </a:ln>
-          <a:effectLst>
-            <a:outerShdw sx="100000" sy="100000" kx="0" ky="0" algn="bl" rotWithShape="0" blurRad="50800" dist="12700" dir="5400000">
-              <a:srgbClr val="1C2E42">
-                <a:alpha val="10000"/>
-              </a:srgbClr>
-            </a:outerShdw>
-          </a:effectLst>
-        </p:spPr>
-      </p:sp>
-      <p:sp>
-        <p:nvSpPr>
-          <p:cNvPr id="23" name="Text 21"/>
-          <p:cNvSpPr/>
-          <p:nvPr/>
-        </p:nvSpPr>
-        <p:spPr>
-          <a:xfrm>
-            <a:off x="2453640" y="1481328"/>
-            <a:ext cx="1447800" cy="384048"/>
-          </a:xfrm>
-          <a:prstGeom prst="rect">
-            <a:avLst/>
-          </a:prstGeom>
-          <a:noFill/>
-          <a:ln/>
         </p:spPr>
         <p:txBody>
           <a:bodyPr wrap="square" rtlCol="0" anchor="ctr"/>
@@ -11055,7 +11003,7 @@
               <a:buNone/>
             </a:pPr>
             <a:r>
-              <a:rPr lang="en-US" sz="900" dirty="0">
+              <a:rPr lang="en-US" sz="900" b="1" dirty="0">
                 <a:solidFill>
                   <a:srgbClr val="17324D"/>
                 </a:solidFill>
@@ -11071,7 +11019,7 @@
       </p:sp>
       <p:sp>
         <p:nvSpPr>
-          <p:cNvPr id="24" name="Shape 22"/>
+          <p:cNvPr id="22" name="Text 20"/>
           <p:cNvSpPr/>
           <p:nvPr/>
         </p:nvSpPr>
@@ -11092,33 +11040,7 @@
             <a:solidFill>
               <a:srgbClr val="D6DBDF"/>
             </a:solidFill>
-            <a:prstDash val="solid"/>
           </a:ln>
-          <a:effectLst>
-            <a:outerShdw sx="100000" sy="100000" kx="0" ky="0" algn="bl" rotWithShape="0" blurRad="50800" dist="12700" dir="5400000">
-              <a:srgbClr val="1C2E42">
-                <a:alpha val="10000"/>
-              </a:srgbClr>
-            </a:outerShdw>
-          </a:effectLst>
-        </p:spPr>
-      </p:sp>
-      <p:sp>
-        <p:nvSpPr>
-          <p:cNvPr id="25" name="Text 23"/>
-          <p:cNvSpPr/>
-          <p:nvPr/>
-        </p:nvSpPr>
-        <p:spPr>
-          <a:xfrm>
-            <a:off x="4221480" y="1481328"/>
-            <a:ext cx="1447800" cy="384048"/>
-          </a:xfrm>
-          <a:prstGeom prst="rect">
-            <a:avLst/>
-          </a:prstGeom>
-          <a:noFill/>
-          <a:ln/>
         </p:spPr>
         <p:txBody>
           <a:bodyPr wrap="square" rtlCol="0" anchor="ctr"/>
@@ -11128,7 +11050,7 @@
               <a:buNone/>
             </a:pPr>
             <a:r>
-              <a:rPr lang="en-US" sz="900" dirty="0">
+              <a:rPr lang="en-US" sz="900" b="1" dirty="0">
                 <a:solidFill>
                   <a:srgbClr val="17324D"/>
                 </a:solidFill>
@@ -11144,7 +11066,7 @@
       </p:sp>
       <p:sp>
         <p:nvSpPr>
-          <p:cNvPr id="26" name="Shape 24"/>
+          <p:cNvPr id="23" name="Text 21"/>
           <p:cNvSpPr/>
           <p:nvPr/>
         </p:nvSpPr>
@@ -11165,33 +11087,7 @@
             <a:solidFill>
               <a:srgbClr val="D6DBDF"/>
             </a:solidFill>
-            <a:prstDash val="solid"/>
           </a:ln>
-          <a:effectLst>
-            <a:outerShdw sx="100000" sy="100000" kx="0" ky="0" algn="bl" rotWithShape="0" blurRad="50800" dist="12700" dir="5400000">
-              <a:srgbClr val="1C2E42">
-                <a:alpha val="10000"/>
-              </a:srgbClr>
-            </a:outerShdw>
-          </a:effectLst>
-        </p:spPr>
-      </p:sp>
-      <p:sp>
-        <p:nvSpPr>
-          <p:cNvPr id="27" name="Text 25"/>
-          <p:cNvSpPr/>
-          <p:nvPr/>
-        </p:nvSpPr>
-        <p:spPr>
-          <a:xfrm>
-            <a:off x="685800" y="1975104"/>
-            <a:ext cx="1447800" cy="384048"/>
-          </a:xfrm>
-          <a:prstGeom prst="rect">
-            <a:avLst/>
-          </a:prstGeom>
-          <a:noFill/>
-          <a:ln/>
         </p:spPr>
         <p:txBody>
           <a:bodyPr wrap="square" rtlCol="0" anchor="ctr"/>
@@ -11201,7 +11097,7 @@
               <a:buNone/>
             </a:pPr>
             <a:r>
-              <a:rPr lang="en-US" sz="900" dirty="0">
+              <a:rPr lang="en-US" sz="900" b="1" dirty="0">
                 <a:solidFill>
                   <a:srgbClr val="17324D"/>
                 </a:solidFill>
@@ -11217,7 +11113,7 @@
       </p:sp>
       <p:sp>
         <p:nvSpPr>
-          <p:cNvPr id="28" name="Shape 26"/>
+          <p:cNvPr id="24" name="Shape 22"/>
           <p:cNvSpPr/>
           <p:nvPr/>
         </p:nvSpPr>
@@ -11251,7 +11147,7 @@
       </p:sp>
       <p:sp>
         <p:nvSpPr>
-          <p:cNvPr id="29" name="Text 27"/>
+          <p:cNvPr id="25" name="Text 23"/>
           <p:cNvSpPr/>
           <p:nvPr/>
         </p:nvSpPr>
@@ -11292,7 +11188,7 @@
       </p:sp>
       <p:sp>
         <p:nvSpPr>
-          <p:cNvPr id="30" name="Shape 28"/>
+          <p:cNvPr id="26" name="Shape 24"/>
           <p:cNvSpPr/>
           <p:nvPr/>
         </p:nvSpPr>
@@ -11326,7 +11222,7 @@
       </p:sp>
       <p:sp>
         <p:nvSpPr>
-          <p:cNvPr id="31" name="Text 29"/>
+          <p:cNvPr id="27" name="Text 25"/>
           <p:cNvSpPr/>
           <p:nvPr/>
         </p:nvSpPr>
@@ -11367,7 +11263,7 @@
       </p:sp>
       <p:sp>
         <p:nvSpPr>
-          <p:cNvPr id="32" name="Shape 30"/>
+          <p:cNvPr id="28" name="Shape 26"/>
           <p:cNvSpPr/>
           <p:nvPr/>
         </p:nvSpPr>
@@ -11401,7 +11297,7 @@
       </p:sp>
       <p:sp>
         <p:nvSpPr>
-          <p:cNvPr id="33" name="Text 31"/>
+          <p:cNvPr id="29" name="Text 27"/>
           <p:cNvSpPr/>
           <p:nvPr/>
         </p:nvSpPr>
@@ -11442,7 +11338,7 @@
       </p:sp>
       <p:sp>
         <p:nvSpPr>
-          <p:cNvPr id="34" name="Text 32"/>
+          <p:cNvPr id="30" name="Text 28"/>
           <p:cNvSpPr/>
           <p:nvPr/>
         </p:nvSpPr>
@@ -11481,7 +11377,7 @@
       </p:sp>
       <p:sp>
         <p:nvSpPr>
-          <p:cNvPr id="35" name="Shape 33"/>
+          <p:cNvPr id="31" name="Shape 29"/>
           <p:cNvSpPr/>
           <p:nvPr/>
         </p:nvSpPr>
@@ -11504,7 +11400,7 @@
       </p:sp>
       <p:sp>
         <p:nvSpPr>
-          <p:cNvPr id="36" name="Shape 34"/>
+          <p:cNvPr id="32" name="Shape 30"/>
           <p:cNvSpPr/>
           <p:nvPr/>
         </p:nvSpPr>
@@ -11527,7 +11423,7 @@
       </p:sp>
       <p:sp>
         <p:nvSpPr>
-          <p:cNvPr id="37" name="Shape 35"/>
+          <p:cNvPr id="33" name="Shape 31"/>
           <p:cNvSpPr/>
           <p:nvPr/>
         </p:nvSpPr>
@@ -11550,7 +11446,7 @@
       </p:sp>
       <p:sp>
         <p:nvSpPr>
-          <p:cNvPr id="38" name="Shape 36"/>
+          <p:cNvPr id="34" name="Shape 32"/>
           <p:cNvSpPr/>
           <p:nvPr/>
         </p:nvSpPr>
@@ -11573,7 +11469,7 @@
       </p:sp>
       <p:sp>
         <p:nvSpPr>
-          <p:cNvPr id="39" name="Shape 37"/>
+          <p:cNvPr id="35" name="Shape 33"/>
           <p:cNvSpPr/>
           <p:nvPr/>
         </p:nvSpPr>

--- a/lessons/6-5/slides.pptx
+++ b/lessons/6-5/slides.pptx
@@ -2495,7 +2495,7 @@
                 <a:ea typeface="Outfit" pitchFamily="34" charset="-122"/>
                 <a:cs typeface="Outfit" pitchFamily="34" charset="-120"/>
               </a:rPr>
-              <a:t>6.EE.3</a:t>
+              <a:t>6.AT.7</a:t>
             </a:r>
             <a:endParaRPr lang="en-US" sz="1000" dirty="0"/>
           </a:p>
@@ -3218,7 +3218,7 @@
                 <a:ea typeface="Outfit" pitchFamily="34" charset="-122"/>
                 <a:cs typeface="Outfit" pitchFamily="34" charset="-120"/>
               </a:rPr>
-              <a:t>6.EE.3</a:t>
+              <a:t>6.AT.7</a:t>
             </a:r>
             <a:endParaRPr lang="en-US" sz="900" dirty="0"/>
           </a:p>
@@ -4328,7 +4328,7 @@
                 <a:ea typeface="Outfit" pitchFamily="34" charset="-122"/>
                 <a:cs typeface="Outfit" pitchFamily="34" charset="-120"/>
               </a:rPr>
-              <a:t>6.EE.3</a:t>
+              <a:t>6.AT.7</a:t>
             </a:r>
             <a:endParaRPr lang="en-US" sz="900" dirty="0"/>
           </a:p>
@@ -5597,7 +5597,7 @@
                 <a:ea typeface="Outfit" pitchFamily="34" charset="-122"/>
                 <a:cs typeface="Outfit" pitchFamily="34" charset="-120"/>
               </a:rPr>
-              <a:t>6.EE.3</a:t>
+              <a:t>6.AT.7</a:t>
             </a:r>
             <a:endParaRPr lang="en-US" sz="900" dirty="0"/>
           </a:p>
@@ -6891,7 +6891,7 @@
                 <a:ea typeface="Outfit" pitchFamily="34" charset="-122"/>
                 <a:cs typeface="Outfit" pitchFamily="34" charset="-120"/>
               </a:rPr>
-              <a:t>6.EE.3</a:t>
+              <a:t>6.AT.7</a:t>
             </a:r>
             <a:endParaRPr lang="en-US" sz="900" dirty="0"/>
           </a:p>
@@ -7953,7 +7953,7 @@
                 <a:ea typeface="Outfit" pitchFamily="34" charset="-122"/>
                 <a:cs typeface="Outfit" pitchFamily="34" charset="-120"/>
               </a:rPr>
-              <a:t>6.EE.3</a:t>
+              <a:t>6.AT.7</a:t>
             </a:r>
             <a:endParaRPr lang="en-US" sz="900" dirty="0"/>
           </a:p>
@@ -8918,7 +8918,7 @@
                 <a:ea typeface="Outfit" pitchFamily="34" charset="-122"/>
                 <a:cs typeface="Outfit" pitchFamily="34" charset="-120"/>
               </a:rPr>
-              <a:t>6.EE.3</a:t>
+              <a:t>6.AT.7</a:t>
             </a:r>
             <a:endParaRPr lang="en-US" sz="900" dirty="0"/>
           </a:p>
@@ -9835,7 +9835,7 @@
                 <a:ea typeface="Outfit" pitchFamily="34" charset="-122"/>
                 <a:cs typeface="Outfit" pitchFamily="34" charset="-120"/>
               </a:rPr>
-              <a:t>6.EE.3</a:t>
+              <a:t>6.AT.7</a:t>
             </a:r>
             <a:endParaRPr lang="en-US" sz="900" dirty="0"/>
           </a:p>
@@ -10963,7 +10963,7 @@
                 <a:ea typeface="Outfit" pitchFamily="34" charset="-122"/>
                 <a:cs typeface="Outfit" pitchFamily="34" charset="-120"/>
               </a:rPr>
-              <a:t>6.EE.3</a:t>
+              <a:t>6.AT.7</a:t>
             </a:r>
             <a:endParaRPr lang="en-US" sz="900" dirty="0"/>
           </a:p>
@@ -12396,7 +12396,7 @@
                 <a:ea typeface="Outfit" pitchFamily="34" charset="-122"/>
                 <a:cs typeface="Outfit" pitchFamily="34" charset="-120"/>
               </a:rPr>
-              <a:t>6.EE.3</a:t>
+              <a:t>6.AT.7</a:t>
             </a:r>
             <a:endParaRPr lang="en-US" sz="900" dirty="0"/>
           </a:p>
@@ -13210,7 +13210,7 @@
                 <a:ea typeface="Outfit" pitchFamily="34" charset="-122"/>
                 <a:cs typeface="Outfit" pitchFamily="34" charset="-120"/>
               </a:rPr>
-              <a:t>6.EE.3</a:t>
+              <a:t>6.AT.7</a:t>
             </a:r>
             <a:endParaRPr lang="en-US" sz="900" dirty="0"/>
           </a:p>
@@ -14270,7 +14270,7 @@
                 <a:ea typeface="Outfit" pitchFamily="34" charset="-122"/>
                 <a:cs typeface="Outfit" pitchFamily="34" charset="-120"/>
               </a:rPr>
-              <a:t>6.EE.3</a:t>
+              <a:t>6.AT.7</a:t>
             </a:r>
             <a:endParaRPr lang="en-US" sz="900" dirty="0"/>
           </a:p>
@@ -15330,7 +15330,7 @@
                 <a:ea typeface="Outfit" pitchFamily="34" charset="-122"/>
                 <a:cs typeface="Outfit" pitchFamily="34" charset="-120"/>
               </a:rPr>
-              <a:t>6.EE.3</a:t>
+              <a:t>6.AT.7</a:t>
             </a:r>
             <a:endParaRPr lang="en-US" sz="900" dirty="0"/>
           </a:p>
@@ -16390,7 +16390,7 @@
                 <a:ea typeface="Outfit" pitchFamily="34" charset="-122"/>
                 <a:cs typeface="Outfit" pitchFamily="34" charset="-120"/>
               </a:rPr>
-              <a:t>6.EE.3</a:t>
+              <a:t>6.AT.7</a:t>
             </a:r>
             <a:endParaRPr lang="en-US" sz="900" dirty="0"/>
           </a:p>
@@ -17450,7 +17450,7 @@
                 <a:ea typeface="Outfit" pitchFamily="34" charset="-122"/>
                 <a:cs typeface="Outfit" pitchFamily="34" charset="-120"/>
               </a:rPr>
-              <a:t>6.EE.3</a:t>
+              <a:t>6.AT.7</a:t>
             </a:r>
             <a:endParaRPr lang="en-US" sz="900" dirty="0"/>
           </a:p>
@@ -18438,7 +18438,7 @@
                 <a:ea typeface="Outfit" pitchFamily="34" charset="-122"/>
                 <a:cs typeface="Outfit" pitchFamily="34" charset="-120"/>
               </a:rPr>
-              <a:t>6.EE.3</a:t>
+              <a:t>6.AT.7</a:t>
             </a:r>
             <a:endParaRPr lang="en-US" sz="900" dirty="0"/>
           </a:p>
@@ -20617,7 +20617,7 @@
                 <a:ea typeface="Outfit" pitchFamily="34" charset="-122"/>
                 <a:cs typeface="Outfit" pitchFamily="34" charset="-120"/>
               </a:rPr>
-              <a:t>6.EE.3</a:t>
+              <a:t>6.AT.7</a:t>
             </a:r>
             <a:endParaRPr lang="en-US" sz="900" dirty="0"/>
           </a:p>

--- a/lessons/6-5/slides.pptx
+++ b/lessons/6-5/slides.pptx
@@ -694,7 +694,7 @@
           <a:p>
             <a:r>
               <a:rPr lang="en-US" dirty="0"/>
-              <a:t>Answer key — 5(2x + 4) = 5 × 2x + 5 × 4 = 10x + 20. You must distribute the 5 to BOTH terms inside the parentheses, not just the first one.</a:t>
+              <a:t>Answer key — '12 less than a number g' means start with g and subtract 12: g − 12. The phrase 'less than' reverses the order — the number being subtracted FROM comes after 'less than.'</a:t>
             </a:r>
             <a:endParaRPr lang="en-US" dirty="0"/>
           </a:p>
@@ -2452,7 +2452,7 @@
                 <a:ea typeface="Outfit" pitchFamily="34" charset="-122"/>
                 <a:cs typeface="Outfit" pitchFamily="34" charset="-120"/>
               </a:rPr>
-              <a:t>The Distributive Property</a:t>
+              <a:t>Write Algebraic Expressions</a:t>
             </a:r>
             <a:endParaRPr lang="en-US" sz="3000" dirty="0"/>
           </a:p>
@@ -2495,7 +2495,7 @@
                 <a:ea typeface="Outfit" pitchFamily="34" charset="-122"/>
                 <a:cs typeface="Outfit" pitchFamily="34" charset="-120"/>
               </a:rPr>
-              <a:t>6.AT.7</a:t>
+              <a:t>6.AT.6a</a:t>
             </a:r>
             <a:endParaRPr lang="en-US" sz="1000" dirty="0"/>
           </a:p>
@@ -2534,7 +2534,7 @@
                 <a:ea typeface="Hanken Grotesk" pitchFamily="34" charset="-122"/>
                 <a:cs typeface="Hanken Grotesk" pitchFamily="34" charset="-120"/>
               </a:rPr>
-              <a:t>Unit 6  ·  Lesson 6-5</a:t>
+              <a:t>Unit 6  ·  Lesson 6-3</a:t>
             </a:r>
             <a:endParaRPr lang="en-US" sz="1000" dirty="0"/>
           </a:p>
@@ -2919,7 +2919,7 @@
                 <a:ea typeface="Hanken Grotesk" pitchFamily="34" charset="-122"/>
                 <a:cs typeface="Hanken Grotesk" pitchFamily="34" charset="-120"/>
               </a:rPr>
-              <a:t>I can use the distributive property to expand and factor expressions.</a:t>
+              <a:t>I can write algebraic expressions from words and real-world situations.</a:t>
             </a:r>
             <a:endParaRPr lang="en-US" sz="1100" dirty="0"/>
           </a:p>
@@ -3045,7 +3045,7 @@
                 <a:ea typeface="Hanken Grotesk" pitchFamily="34" charset="-122"/>
                 <a:cs typeface="Hanken Grotesk" pitchFamily="34" charset="-120"/>
               </a:rPr>
-              <a:t>I can explain my steps using the words distributive property, factor, expand, and equivalent.</a:t>
+              <a:t>I can explain my expression using the words variable, coefficient, constant, and algebraic expression.</a:t>
             </a:r>
             <a:endParaRPr lang="en-US" sz="1050" dirty="0"/>
           </a:p>
@@ -3218,7 +3218,7 @@
                 <a:ea typeface="Outfit" pitchFamily="34" charset="-122"/>
                 <a:cs typeface="Outfit" pitchFamily="34" charset="-120"/>
               </a:rPr>
-              <a:t>6.AT.7</a:t>
+              <a:t>6.AT.6a</a:t>
             </a:r>
             <a:endParaRPr lang="en-US" sz="900" dirty="0"/>
           </a:p>
@@ -3437,7 +3437,7 @@
                 <a:ea typeface="Hanken Grotesk" pitchFamily="34" charset="-122"/>
                 <a:cs typeface="Hanken Grotesk" pitchFamily="34" charset="-120"/>
               </a:rPr>
-              <a:t>Reveal Math Grade 6  ·  Unit 6  ·  Lesson 6-5</a:t>
+              <a:t>Reveal Math Grade 6  ·  Unit 6  ·  Lesson 6-3</a:t>
             </a:r>
             <a:endParaRPr lang="en-US" sz="750" dirty="0"/>
           </a:p>
@@ -3549,7 +3549,7 @@
                 <a:ea typeface="Outfit" pitchFamily="34" charset="-122"/>
                 <a:cs typeface="Outfit" pitchFamily="34" charset="-120"/>
               </a:rPr>
-              <a:t>Expand each expression using the distributive property. Then simplify to find the value.</a:t>
+              <a:t>Read each word phrase and sort it into the correct algebraic expression.</a:t>
             </a:r>
             <a:endParaRPr lang="en-US" sz="1050" dirty="0"/>
           </a:p>
@@ -3635,7 +3635,7 @@
                 <a:ea typeface="Hanken Grotesk" pitchFamily="34" charset="-122"/>
                 <a:cs typeface="Hanken Grotesk" pitchFamily="34" charset="-120"/>
               </a:rPr>
-              <a:t>Card 1</a:t>
+              <a:t>5 more than a number n → n + 5</a:t>
             </a:r>
             <a:endParaRPr lang="en-US" sz="900" dirty="0"/>
           </a:p>
@@ -3682,7 +3682,7 @@
                 <a:ea typeface="Hanken Grotesk" pitchFamily="34" charset="-122"/>
                 <a:cs typeface="Hanken Grotesk" pitchFamily="34" charset="-120"/>
               </a:rPr>
-              <a:t>Card 2</a:t>
+              <a:t>the sum of 12 and a number x → 12 + x</a:t>
             </a:r>
             <a:endParaRPr lang="en-US" sz="900" dirty="0"/>
           </a:p>
@@ -3729,7 +3729,7 @@
                 <a:ea typeface="Hanken Grotesk" pitchFamily="34" charset="-122"/>
                 <a:cs typeface="Hanken Grotesk" pitchFamily="34" charset="-120"/>
               </a:rPr>
-              <a:t>Card 3</a:t>
+              <a:t>a number y increased by 8 → y + 8</a:t>
             </a:r>
             <a:endParaRPr lang="en-US" sz="900" dirty="0"/>
           </a:p>
@@ -3776,7 +3776,7 @@
                 <a:ea typeface="Hanken Grotesk" pitchFamily="34" charset="-122"/>
                 <a:cs typeface="Hanken Grotesk" pitchFamily="34" charset="-120"/>
               </a:rPr>
-              <a:t>Card 4</a:t>
+              <a:t>7 less than a number p → p − 7</a:t>
             </a:r>
             <a:endParaRPr lang="en-US" sz="900" dirty="0"/>
           </a:p>
@@ -3784,18 +3784,112 @@
       </p:sp>
       <p:sp>
         <p:nvSpPr>
-          <p:cNvPr id="24" name="Shape 22"/>
-          <p:cNvSpPr/>
-          <p:nvPr/>
-        </p:nvSpPr>
-        <p:spPr>
-          <a:xfrm>
-            <a:off x="594360" y="2560320"/>
-            <a:ext cx="2514600" cy="1965960"/>
+          <p:cNvPr id="24" name="Text 22"/>
+          <p:cNvSpPr/>
+          <p:nvPr/>
+        </p:nvSpPr>
+        <p:spPr>
+          <a:xfrm>
+            <a:off x="2362200" y="1975104"/>
+            <a:ext cx="1630680" cy="384048"/>
           </a:xfrm>
           <a:prstGeom prst="roundRect">
             <a:avLst>
-              <a:gd name="adj" fmla="val 2326"/>
+              <a:gd name="adj" fmla="val 11905"/>
+            </a:avLst>
+          </a:prstGeom>
+          <a:solidFill>
+            <a:srgbClr val="FBEFD0"/>
+          </a:solidFill>
+          <a:ln w="12700">
+            <a:solidFill>
+              <a:srgbClr val="D6DBDF"/>
+            </a:solidFill>
+          </a:ln>
+        </p:spPr>
+        <p:txBody>
+          <a:bodyPr wrap="square" rtlCol="0" anchor="ctr"/>
+          <a:lstStyle/>
+          <a:p>
+            <a:pPr algn="ctr" indent="0" marL="0">
+              <a:buNone/>
+            </a:pPr>
+            <a:r>
+              <a:rPr lang="en-US" sz="900" b="1" dirty="0">
+                <a:solidFill>
+                  <a:srgbClr val="17324D"/>
+                </a:solidFill>
+                <a:latin typeface="Hanken Grotesk" pitchFamily="34" charset="0"/>
+                <a:ea typeface="Hanken Grotesk" pitchFamily="34" charset="-122"/>
+                <a:cs typeface="Hanken Grotesk" pitchFamily="34" charset="-120"/>
+              </a:rPr>
+              <a:t>a number w decreased by 3 → w − 3</a:t>
+            </a:r>
+            <a:endParaRPr lang="en-US" sz="900" dirty="0"/>
+          </a:p>
+        </p:txBody>
+      </p:sp>
+      <p:sp>
+        <p:nvSpPr>
+          <p:cNvPr id="25" name="Text 23"/>
+          <p:cNvSpPr/>
+          <p:nvPr/>
+        </p:nvSpPr>
+        <p:spPr>
+          <a:xfrm>
+            <a:off x="4130040" y="1975104"/>
+            <a:ext cx="1630680" cy="384048"/>
+          </a:xfrm>
+          <a:prstGeom prst="roundRect">
+            <a:avLst>
+              <a:gd name="adj" fmla="val 11905"/>
+            </a:avLst>
+          </a:prstGeom>
+          <a:solidFill>
+            <a:srgbClr val="FBEFD0"/>
+          </a:solidFill>
+          <a:ln w="12700">
+            <a:solidFill>
+              <a:srgbClr val="D6DBDF"/>
+            </a:solidFill>
+          </a:ln>
+        </p:spPr>
+        <p:txBody>
+          <a:bodyPr wrap="square" rtlCol="0" anchor="ctr"/>
+          <a:lstStyle/>
+          <a:p>
+            <a:pPr algn="ctr" indent="0" marL="0">
+              <a:buNone/>
+            </a:pPr>
+            <a:r>
+              <a:rPr lang="en-US" sz="900" b="1" dirty="0">
+                <a:solidFill>
+                  <a:srgbClr val="17324D"/>
+                </a:solidFill>
+                <a:latin typeface="Hanken Grotesk" pitchFamily="34" charset="0"/>
+                <a:ea typeface="Hanken Grotesk" pitchFamily="34" charset="-122"/>
+                <a:cs typeface="Hanken Grotesk" pitchFamily="34" charset="-120"/>
+              </a:rPr>
+              <a:t>the product of 4 and a number m → 4m</a:t>
+            </a:r>
+            <a:endParaRPr lang="en-US" sz="900" dirty="0"/>
+          </a:p>
+        </p:txBody>
+      </p:sp>
+      <p:sp>
+        <p:nvSpPr>
+          <p:cNvPr id="26" name="Shape 24"/>
+          <p:cNvSpPr/>
+          <p:nvPr/>
+        </p:nvSpPr>
+        <p:spPr>
+          <a:xfrm>
+            <a:off x="594360" y="2560320"/>
+            <a:ext cx="1630680" cy="1965960"/>
+          </a:xfrm>
+          <a:prstGeom prst="roundRect">
+            <a:avLst>
+              <a:gd name="adj" fmla="val 2804"/>
             </a:avLst>
           </a:prstGeom>
           <a:solidFill>
@@ -3818,14 +3912,14 @@
       </p:sp>
       <p:sp>
         <p:nvSpPr>
-          <p:cNvPr id="25" name="Text 23"/>
+          <p:cNvPr id="27" name="Text 25"/>
           <p:cNvSpPr/>
           <p:nvPr/>
         </p:nvSpPr>
         <p:spPr>
           <a:xfrm>
             <a:off x="594360" y="2560320"/>
-            <a:ext cx="2514600" cy="292608"/>
+            <a:ext cx="1630680" cy="292608"/>
           </a:xfrm>
           <a:prstGeom prst="rect">
             <a:avLst/>
@@ -3851,7 +3945,7 @@
                 <a:ea typeface="Outfit" pitchFamily="34" charset="-122"/>
                 <a:cs typeface="Outfit" pitchFamily="34" charset="-120"/>
               </a:rPr>
-              <a:t>Group A</a:t>
+              <a:t>Addition Expressions</a:t>
             </a:r>
             <a:endParaRPr lang="en-US" sz="950" dirty="0"/>
           </a:p>
@@ -3859,18 +3953,18 @@
       </p:sp>
       <p:sp>
         <p:nvSpPr>
-          <p:cNvPr id="26" name="Shape 24"/>
-          <p:cNvSpPr/>
-          <p:nvPr/>
-        </p:nvSpPr>
-        <p:spPr>
-          <a:xfrm>
-            <a:off x="3246120" y="2560320"/>
-            <a:ext cx="2514600" cy="1965960"/>
+          <p:cNvPr id="28" name="Shape 26"/>
+          <p:cNvSpPr/>
+          <p:nvPr/>
+        </p:nvSpPr>
+        <p:spPr>
+          <a:xfrm>
+            <a:off x="2362200" y="2560320"/>
+            <a:ext cx="1630680" cy="1965960"/>
           </a:xfrm>
           <a:prstGeom prst="roundRect">
             <a:avLst>
-              <a:gd name="adj" fmla="val 2326"/>
+              <a:gd name="adj" fmla="val 2804"/>
             </a:avLst>
           </a:prstGeom>
           <a:solidFill>
@@ -3893,14 +3987,14 @@
       </p:sp>
       <p:sp>
         <p:nvSpPr>
-          <p:cNvPr id="27" name="Text 25"/>
-          <p:cNvSpPr/>
-          <p:nvPr/>
-        </p:nvSpPr>
-        <p:spPr>
-          <a:xfrm>
-            <a:off x="3246120" y="2560320"/>
-            <a:ext cx="2514600" cy="292608"/>
+          <p:cNvPr id="29" name="Text 27"/>
+          <p:cNvSpPr/>
+          <p:nvPr/>
+        </p:nvSpPr>
+        <p:spPr>
+          <a:xfrm>
+            <a:off x="2362200" y="2560320"/>
+            <a:ext cx="1630680" cy="292608"/>
           </a:xfrm>
           <a:prstGeom prst="rect">
             <a:avLst/>
@@ -3926,7 +4020,7 @@
                 <a:ea typeface="Outfit" pitchFamily="34" charset="-122"/>
                 <a:cs typeface="Outfit" pitchFamily="34" charset="-120"/>
               </a:rPr>
-              <a:t>Group B</a:t>
+              <a:t>Subtraction Expressions</a:t>
             </a:r>
             <a:endParaRPr lang="en-US" sz="950" dirty="0"/>
           </a:p>
@@ -3934,7 +4028,82 @@
       </p:sp>
       <p:sp>
         <p:nvSpPr>
-          <p:cNvPr id="28" name="Shape 26"/>
+          <p:cNvPr id="30" name="Shape 28"/>
+          <p:cNvSpPr/>
+          <p:nvPr/>
+        </p:nvSpPr>
+        <p:spPr>
+          <a:xfrm>
+            <a:off x="4130040" y="2560320"/>
+            <a:ext cx="1630680" cy="1965960"/>
+          </a:xfrm>
+          <a:prstGeom prst="roundRect">
+            <a:avLst>
+              <a:gd name="adj" fmla="val 2804"/>
+            </a:avLst>
+          </a:prstGeom>
+          <a:solidFill>
+            <a:srgbClr val="FFFFFF"/>
+          </a:solidFill>
+          <a:ln w="12700">
+            <a:solidFill>
+              <a:srgbClr val="7A5C8E"/>
+            </a:solidFill>
+            <a:prstDash val="solid"/>
+          </a:ln>
+          <a:effectLst>
+            <a:outerShdw sx="100000" sy="100000" kx="0" ky="0" algn="bl" rotWithShape="0" blurRad="50800" dist="12700" dir="5400000">
+              <a:srgbClr val="1C2E42">
+                <a:alpha val="10000"/>
+              </a:srgbClr>
+            </a:outerShdw>
+          </a:effectLst>
+        </p:spPr>
+      </p:sp>
+      <p:sp>
+        <p:nvSpPr>
+          <p:cNvPr id="31" name="Text 29"/>
+          <p:cNvSpPr/>
+          <p:nvPr/>
+        </p:nvSpPr>
+        <p:spPr>
+          <a:xfrm>
+            <a:off x="4130040" y="2560320"/>
+            <a:ext cx="1630680" cy="292608"/>
+          </a:xfrm>
+          <a:prstGeom prst="rect">
+            <a:avLst/>
+          </a:prstGeom>
+          <a:solidFill>
+            <a:srgbClr val="7A5C8E"/>
+          </a:solidFill>
+          <a:ln/>
+        </p:spPr>
+        <p:txBody>
+          <a:bodyPr wrap="square" rtlCol="0" anchor="ctr"/>
+          <a:lstStyle/>
+          <a:p>
+            <a:pPr algn="ctr" indent="0" marL="0">
+              <a:buNone/>
+            </a:pPr>
+            <a:r>
+              <a:rPr lang="en-US" sz="950" b="1" dirty="0">
+                <a:solidFill>
+                  <a:srgbClr val="FFFFFF"/>
+                </a:solidFill>
+                <a:latin typeface="Outfit" pitchFamily="34" charset="0"/>
+                <a:ea typeface="Outfit" pitchFamily="34" charset="-122"/>
+                <a:cs typeface="Outfit" pitchFamily="34" charset="-120"/>
+              </a:rPr>
+              <a:t>Multiplication Expressions</a:t>
+            </a:r>
+            <a:endParaRPr lang="en-US" sz="950" dirty="0"/>
+          </a:p>
+        </p:txBody>
+      </p:sp>
+      <p:sp>
+        <p:nvSpPr>
+          <p:cNvPr id="32" name="Shape 30"/>
           <p:cNvSpPr/>
           <p:nvPr/>
         </p:nvSpPr>
@@ -3968,7 +4137,7 @@
       </p:sp>
       <p:sp>
         <p:nvSpPr>
-          <p:cNvPr id="29" name="Text 27"/>
+          <p:cNvPr id="33" name="Text 31"/>
           <p:cNvSpPr/>
           <p:nvPr/>
         </p:nvSpPr>
@@ -4009,7 +4178,7 @@
       </p:sp>
       <p:sp>
         <p:nvSpPr>
-          <p:cNvPr id="30" name="Text 28"/>
+          <p:cNvPr id="34" name="Text 32"/>
           <p:cNvSpPr/>
           <p:nvPr/>
         </p:nvSpPr>
@@ -4040,7 +4209,7 @@
                 <a:ea typeface="Hanken Grotesk" pitchFamily="34" charset="-122"/>
                 <a:cs typeface="Hanken Grotesk" pitchFamily="34" charset="-120"/>
               </a:rPr>
-              <a:t>When you expand 5(2x + 4), why must the 5 multiply BOTH terms inside the parentheses?</a:t>
+              <a:t>How do you turn words into an expression? Why does '12 less than a number g' become g − 12 and not 12 − g?</a:t>
             </a:r>
             <a:endParaRPr lang="en-US" sz="1000" dirty="0"/>
           </a:p>
@@ -4048,7 +4217,7 @@
       </p:sp>
       <p:sp>
         <p:nvSpPr>
-          <p:cNvPr id="31" name="Shape 29"/>
+          <p:cNvPr id="35" name="Shape 33"/>
           <p:cNvSpPr/>
           <p:nvPr/>
         </p:nvSpPr>
@@ -4071,7 +4240,7 @@
       </p:sp>
       <p:sp>
         <p:nvSpPr>
-          <p:cNvPr id="32" name="Shape 30"/>
+          <p:cNvPr id="36" name="Shape 34"/>
           <p:cNvSpPr/>
           <p:nvPr/>
         </p:nvSpPr>
@@ -4094,7 +4263,7 @@
       </p:sp>
       <p:sp>
         <p:nvSpPr>
-          <p:cNvPr id="33" name="Shape 31"/>
+          <p:cNvPr id="37" name="Shape 35"/>
           <p:cNvSpPr/>
           <p:nvPr/>
         </p:nvSpPr>
@@ -4117,7 +4286,7 @@
       </p:sp>
       <p:sp>
         <p:nvSpPr>
-          <p:cNvPr id="34" name="Shape 32"/>
+          <p:cNvPr id="38" name="Shape 36"/>
           <p:cNvSpPr/>
           <p:nvPr/>
         </p:nvSpPr>
@@ -4140,7 +4309,7 @@
       </p:sp>
       <p:sp>
         <p:nvSpPr>
-          <p:cNvPr id="35" name="Shape 33"/>
+          <p:cNvPr id="39" name="Shape 37"/>
           <p:cNvSpPr/>
           <p:nvPr/>
         </p:nvSpPr>
@@ -4328,7 +4497,7 @@
                 <a:ea typeface="Outfit" pitchFamily="34" charset="-122"/>
                 <a:cs typeface="Outfit" pitchFamily="34" charset="-120"/>
               </a:rPr>
-              <a:t>6.AT.7</a:t>
+              <a:t>6.AT.6a</a:t>
             </a:r>
             <a:endParaRPr lang="en-US" sz="900" dirty="0"/>
           </a:p>
@@ -4547,7 +4716,7 @@
                 <a:ea typeface="Hanken Grotesk" pitchFamily="34" charset="-122"/>
                 <a:cs typeface="Hanken Grotesk" pitchFamily="34" charset="-120"/>
               </a:rPr>
-              <a:t>Reveal Math Grade 6  ·  Unit 6  ·  Lesson 6-5</a:t>
+              <a:t>Reveal Math Grade 6  ·  Unit 6  ·  Lesson 6-3</a:t>
             </a:r>
             <a:endParaRPr lang="en-US" sz="750" dirty="0"/>
           </a:p>
@@ -4702,7 +4871,7 @@
                 <a:ea typeface="Outfit" pitchFamily="34" charset="-122"/>
                 <a:cs typeface="Outfit" pitchFamily="34" charset="-120"/>
               </a:rPr>
-              <a:t>Find the Distributive Error</a:t>
+              <a:t>Find the Translation Error</a:t>
             </a:r>
             <a:endParaRPr lang="en-US" sz="1100" dirty="0"/>
           </a:p>
@@ -4867,7 +5036,7 @@
                 <a:ea typeface="Hanken Grotesk" pitchFamily="34" charset="-122"/>
                 <a:cs typeface="Hanken Grotesk" pitchFamily="34" charset="-120"/>
               </a:rPr>
-              <a:t>Expression:  </a:t>
+              <a:t>Phrase:  </a:t>
             </a:r>
             <a:pPr indent="0" marL="0">
               <a:buNone/>
@@ -4881,7 +5050,7 @@
                 <a:ea typeface="Courier New" pitchFamily="34" charset="-122"/>
                 <a:cs typeface="Courier New" pitchFamily="34" charset="-120"/>
               </a:rPr>
-              <a:t>5(2x + 4)</a:t>
+              <a:t>12 less than a number g</a:t>
             </a:r>
             <a:endParaRPr lang="en-US" sz="950" dirty="0"/>
           </a:p>
@@ -4934,7 +5103,7 @@
                 <a:ea typeface="Hanken Grotesk" pitchFamily="34" charset="-122"/>
                 <a:cs typeface="Hanken Grotesk" pitchFamily="34" charset="-120"/>
               </a:rPr>
-              <a:t>Distribute:  </a:t>
+              <a:t>Student's expression:  </a:t>
             </a:r>
             <a:pPr indent="0" marL="0">
               <a:buNone/>
@@ -4948,7 +5117,7 @@
                 <a:ea typeface="Courier New" pitchFamily="34" charset="-122"/>
                 <a:cs typeface="Courier New" pitchFamily="34" charset="-120"/>
               </a:rPr>
-              <a:t>5 × 2x + 4</a:t>
+              <a:t>12 − g</a:t>
             </a:r>
             <a:endParaRPr lang="en-US" sz="950" dirty="0"/>
           </a:p>
@@ -5001,7 +5170,7 @@
                 <a:ea typeface="Hanken Grotesk" pitchFamily="34" charset="-122"/>
                 <a:cs typeface="Hanken Grotesk" pitchFamily="34" charset="-120"/>
               </a:rPr>
-              <a:t>Simplify:  </a:t>
+              <a:t>Reasoning:  </a:t>
             </a:r>
             <a:pPr indent="0" marL="0">
               <a:buNone/>
@@ -5015,7 +5184,7 @@
                 <a:ea typeface="Courier New" pitchFamily="34" charset="-122"/>
                 <a:cs typeface="Courier New" pitchFamily="34" charset="-120"/>
               </a:rPr>
-              <a:t>10x + 4</a:t>
+              <a:t>I see 'less than' so I subtract, and 12 comes first in the phrase.</a:t>
             </a:r>
             <a:endParaRPr lang="en-US" sz="950" dirty="0"/>
           </a:p>
@@ -5597,7 +5766,7 @@
                 <a:ea typeface="Outfit" pitchFamily="34" charset="-122"/>
                 <a:cs typeface="Outfit" pitchFamily="34" charset="-120"/>
               </a:rPr>
-              <a:t>6.AT.7</a:t>
+              <a:t>6.AT.6a</a:t>
             </a:r>
             <a:endParaRPr lang="en-US" sz="900" dirty="0"/>
           </a:p>
@@ -5816,7 +5985,7 @@
                 <a:ea typeface="Hanken Grotesk" pitchFamily="34" charset="-122"/>
                 <a:cs typeface="Hanken Grotesk" pitchFamily="34" charset="-120"/>
               </a:rPr>
-              <a:t>Reveal Math Grade 6  ·  Unit 6  ·  Lesson 6-5</a:t>
+              <a:t>Reveal Math Grade 6  ·  Unit 6  ·  Lesson 6-3</a:t>
             </a:r>
             <a:endParaRPr lang="en-US" sz="750" dirty="0"/>
           </a:p>
@@ -6028,7 +6197,7 @@
                 <a:ea typeface="Hanken Grotesk" pitchFamily="34" charset="-122"/>
                 <a:cs typeface="Hanken Grotesk" pitchFamily="34" charset="-120"/>
               </a:rPr>
-              <a:t>Each bundle has a ticket ($15) and a snack ($5). For 3 bundles I can write 3(15 + 5).</a:t>
+              <a:t>Tickets cost $12 each, plus a flat $50 venue fee. Let t be the number of tickets.</a:t>
             </a:r>
             <a:endParaRPr lang="en-US" sz="1050" dirty="0"/>
           </a:p>
@@ -6126,7 +6295,7 @@
                 <a:ea typeface="Hanken Grotesk" pitchFamily="34" charset="-122"/>
                 <a:cs typeface="Hanken Grotesk" pitchFamily="34" charset="-120"/>
               </a:rPr>
-              <a:t>Way 1: add inside first. 15 + 5 = 20, then 3 × 20 = 60.</a:t>
+              <a:t>"$12 each ticket" means 12 times t, which I write as 12t.</a:t>
             </a:r>
             <a:endParaRPr lang="en-US" sz="1050" dirty="0"/>
           </a:p>
@@ -6224,7 +6393,7 @@
                 <a:ea typeface="Hanken Grotesk" pitchFamily="34" charset="-122"/>
                 <a:cs typeface="Hanken Grotesk" pitchFamily="34" charset="-120"/>
               </a:rPr>
-              <a:t>Way 2: distribute the 3 to each part. 3 × 15 + 3 × 5.</a:t>
+              <a:t>The flat fee $50 is added once, so I add 50.</a:t>
             </a:r>
             <a:endParaRPr lang="en-US" sz="1050" dirty="0"/>
           </a:p>
@@ -6322,7 +6491,7 @@
                 <a:ea typeface="Hanken Grotesk" pitchFamily="34" charset="-122"/>
                 <a:cs typeface="Hanken Grotesk" pitchFamily="34" charset="-120"/>
               </a:rPr>
-              <a:t>That is 45 + 15 = 60.</a:t>
+              <a:t>I put them together: total revenue = 12t + 50.</a:t>
             </a:r>
             <a:endParaRPr lang="en-US" sz="1050" dirty="0"/>
           </a:p>
@@ -6331,104 +6500,6 @@
       <p:sp>
         <p:nvSpPr>
           <p:cNvPr id="31" name="Shape 29"/>
-          <p:cNvSpPr/>
-          <p:nvPr/>
-        </p:nvSpPr>
-        <p:spPr>
-          <a:xfrm>
-            <a:off x="594360" y="3145536"/>
-            <a:ext cx="274320" cy="274320"/>
-          </a:xfrm>
-          <a:prstGeom prst="ellipse">
-            <a:avLst/>
-          </a:prstGeom>
-          <a:solidFill>
-            <a:srgbClr val="7A5C8E"/>
-          </a:solidFill>
-          <a:ln/>
-        </p:spPr>
-      </p:sp>
-      <p:sp>
-        <p:nvSpPr>
-          <p:cNvPr id="32" name="Text 30"/>
-          <p:cNvSpPr/>
-          <p:nvPr/>
-        </p:nvSpPr>
-        <p:spPr>
-          <a:xfrm>
-            <a:off x="594360" y="3145536"/>
-            <a:ext cx="274320" cy="274320"/>
-          </a:xfrm>
-          <a:prstGeom prst="rect">
-            <a:avLst/>
-          </a:prstGeom>
-          <a:noFill/>
-          <a:ln/>
-        </p:spPr>
-        <p:txBody>
-          <a:bodyPr wrap="square" rtlCol="0" anchor="ctr"/>
-          <a:lstStyle/>
-          <a:p>
-            <a:pPr algn="ctr" indent="0" marL="0">
-              <a:buNone/>
-            </a:pPr>
-            <a:r>
-              <a:rPr lang="en-US" sz="1100" b="1" dirty="0">
-                <a:solidFill>
-                  <a:srgbClr val="FFFFFF"/>
-                </a:solidFill>
-                <a:latin typeface="Outfit" pitchFamily="34" charset="0"/>
-                <a:ea typeface="Outfit" pitchFamily="34" charset="-122"/>
-                <a:cs typeface="Outfit" pitchFamily="34" charset="-120"/>
-              </a:rPr>
-              <a:t>5</a:t>
-            </a:r>
-            <a:endParaRPr lang="en-US" sz="1100" dirty="0"/>
-          </a:p>
-        </p:txBody>
-      </p:sp>
-      <p:sp>
-        <p:nvSpPr>
-          <p:cNvPr id="33" name="Text 31"/>
-          <p:cNvSpPr/>
-          <p:nvPr/>
-        </p:nvSpPr>
-        <p:spPr>
-          <a:xfrm>
-            <a:off x="978408" y="3090672"/>
-            <a:ext cx="3456432" cy="420624"/>
-          </a:xfrm>
-          <a:prstGeom prst="rect">
-            <a:avLst/>
-          </a:prstGeom>
-          <a:noFill/>
-          <a:ln/>
-        </p:spPr>
-        <p:txBody>
-          <a:bodyPr wrap="square" rtlCol="0" anchor="ctr"/>
-          <a:lstStyle/>
-          <a:p>
-            <a:pPr indent="0" marL="0">
-              <a:buNone/>
-            </a:pPr>
-            <a:r>
-              <a:rPr lang="en-US" sz="1050" dirty="0">
-                <a:solidFill>
-                  <a:srgbClr val="24323F"/>
-                </a:solidFill>
-                <a:latin typeface="Hanken Grotesk" pitchFamily="34" charset="0"/>
-                <a:ea typeface="Hanken Grotesk" pitchFamily="34" charset="-122"/>
-                <a:cs typeface="Hanken Grotesk" pitchFamily="34" charset="-120"/>
-              </a:rPr>
-              <a:t>Both ways give $60, so 3(15 + 5) = 3 × 15 + 3 × 5.</a:t>
-            </a:r>
-            <a:endParaRPr lang="en-US" sz="1050" dirty="0"/>
-          </a:p>
-        </p:txBody>
-      </p:sp>
-      <p:sp>
-        <p:nvSpPr>
-          <p:cNvPr id="34" name="Shape 32"/>
           <p:cNvSpPr/>
           <p:nvPr/>
         </p:nvSpPr>
@@ -6462,7 +6533,7 @@
       </p:sp>
       <p:sp>
         <p:nvSpPr>
-          <p:cNvPr id="35" name="Text 33"/>
+          <p:cNvPr id="32" name="Text 30"/>
           <p:cNvSpPr/>
           <p:nvPr/>
         </p:nvSpPr>
@@ -6503,7 +6574,7 @@
       </p:sp>
       <p:sp>
         <p:nvSpPr>
-          <p:cNvPr id="36" name="Text 34"/>
+          <p:cNvPr id="33" name="Text 31"/>
           <p:cNvSpPr/>
           <p:nvPr/>
         </p:nvSpPr>
@@ -6542,7 +6613,7 @@
       </p:sp>
       <p:sp>
         <p:nvSpPr>
-          <p:cNvPr id="37" name="Shape 35"/>
+          <p:cNvPr id="34" name="Shape 32"/>
           <p:cNvSpPr/>
           <p:nvPr/>
         </p:nvSpPr>
@@ -6565,7 +6636,7 @@
       </p:sp>
       <p:sp>
         <p:nvSpPr>
-          <p:cNvPr id="38" name="Shape 36"/>
+          <p:cNvPr id="35" name="Shape 33"/>
           <p:cNvSpPr/>
           <p:nvPr/>
         </p:nvSpPr>
@@ -6588,7 +6659,7 @@
       </p:sp>
       <p:sp>
         <p:nvSpPr>
-          <p:cNvPr id="39" name="Shape 37"/>
+          <p:cNvPr id="36" name="Shape 34"/>
           <p:cNvSpPr/>
           <p:nvPr/>
         </p:nvSpPr>
@@ -6611,7 +6682,7 @@
       </p:sp>
       <p:sp>
         <p:nvSpPr>
-          <p:cNvPr id="40" name="Shape 38"/>
+          <p:cNvPr id="37" name="Shape 35"/>
           <p:cNvSpPr/>
           <p:nvPr/>
         </p:nvSpPr>
@@ -6634,7 +6705,7 @@
       </p:sp>
       <p:sp>
         <p:nvSpPr>
-          <p:cNvPr id="41" name="Shape 39"/>
+          <p:cNvPr id="38" name="Shape 36"/>
           <p:cNvSpPr/>
           <p:nvPr/>
         </p:nvSpPr>
@@ -6657,7 +6728,7 @@
       </p:sp>
       <p:sp>
         <p:nvSpPr>
-          <p:cNvPr id="42" name="Shape 40"/>
+          <p:cNvPr id="39" name="Shape 37"/>
           <p:cNvSpPr/>
           <p:nvPr/>
         </p:nvSpPr>
@@ -6680,7 +6751,7 @@
       </p:sp>
       <p:sp>
         <p:nvSpPr>
-          <p:cNvPr id="43" name="Shape 41"/>
+          <p:cNvPr id="40" name="Shape 38"/>
           <p:cNvSpPr/>
           <p:nvPr/>
         </p:nvSpPr>
@@ -6703,7 +6774,7 @@
       </p:sp>
       <p:sp>
         <p:nvSpPr>
-          <p:cNvPr id="44" name="Shape 42"/>
+          <p:cNvPr id="41" name="Shape 39"/>
           <p:cNvSpPr/>
           <p:nvPr/>
         </p:nvSpPr>
@@ -6891,7 +6962,7 @@
                 <a:ea typeface="Outfit" pitchFamily="34" charset="-122"/>
                 <a:cs typeface="Outfit" pitchFamily="34" charset="-120"/>
               </a:rPr>
-              <a:t>6.AT.7</a:t>
+              <a:t>6.AT.6a</a:t>
             </a:r>
             <a:endParaRPr lang="en-US" sz="900" dirty="0"/>
           </a:p>
@@ -7110,7 +7181,7 @@
                 <a:ea typeface="Hanken Grotesk" pitchFamily="34" charset="-122"/>
                 <a:cs typeface="Hanken Grotesk" pitchFamily="34" charset="-120"/>
               </a:rPr>
-              <a:t>Reveal Math Grade 6  ·  Unit 6  ·  Lesson 6-5</a:t>
+              <a:t>Reveal Math Grade 6  ·  Unit 6  ·  Lesson 6-3</a:t>
             </a:r>
             <a:endParaRPr lang="en-US" sz="750" dirty="0"/>
           </a:p>
@@ -7336,7 +7407,7 @@
                 <a:ea typeface="Hanken Grotesk" pitchFamily="34" charset="-122"/>
                 <a:cs typeface="Hanken Grotesk" pitchFamily="34" charset="-120"/>
               </a:rPr>
-              <a:t>Sketch a model for today's problem. Label it using Distributive Property and Factor.</a:t>
+              <a:t>Sketch a model for today's problem. Label it using Variable and Algebraic Expression.</a:t>
             </a:r>
             <a:endParaRPr lang="en-US" sz="1000" dirty="0"/>
           </a:p>
@@ -7484,7 +7555,7 @@
                 <a:ea typeface="Hanken Grotesk" pitchFamily="34" charset="-122"/>
                 <a:cs typeface="Hanken Grotesk" pitchFamily="34" charset="-120"/>
               </a:rPr>
-              <a:t>In 2–3 sentences, explain "The number outside the parentheses gets "shared" with every term inside." in your own words.</a:t>
+              <a:t>In 2–3 sentences, explain "Words like "each" or "per" mean multiply, and "plus" or "more than" mean add." in your own words.</a:t>
             </a:r>
             <a:endParaRPr lang="en-US" sz="1000" dirty="0"/>
           </a:p>
@@ -7780,7 +7851,7 @@
                 <a:ea typeface="Hanken Grotesk" pitchFamily="34" charset="-122"/>
                 <a:cs typeface="Hanken Grotesk" pitchFamily="34" charset="-120"/>
               </a:rPr>
-              <a:t>Write your own problem that uses Distributive Property, then solve it and make an answer key.</a:t>
+              <a:t>Write your own problem that uses Variable, then solve it and make an answer key.</a:t>
             </a:r>
             <a:endParaRPr lang="en-US" sz="1000" dirty="0"/>
           </a:p>
@@ -7953,7 +8024,7 @@
                 <a:ea typeface="Outfit" pitchFamily="34" charset="-122"/>
                 <a:cs typeface="Outfit" pitchFamily="34" charset="-120"/>
               </a:rPr>
-              <a:t>6.AT.7</a:t>
+              <a:t>6.AT.6a</a:t>
             </a:r>
             <a:endParaRPr lang="en-US" sz="900" dirty="0"/>
           </a:p>
@@ -8172,7 +8243,7 @@
                 <a:ea typeface="Hanken Grotesk" pitchFamily="34" charset="-122"/>
                 <a:cs typeface="Hanken Grotesk" pitchFamily="34" charset="-120"/>
               </a:rPr>
-              <a:t>Reveal Math Grade 6  ·  Unit 6  ·  Lesson 6-5</a:t>
+              <a:t>Reveal Math Grade 6  ·  Unit 6  ·  Lesson 6-3</a:t>
             </a:r>
             <a:endParaRPr lang="en-US" sz="750" dirty="0"/>
           </a:p>
@@ -8341,7 +8412,7 @@
                 <a:ea typeface="Hanken Grotesk" pitchFamily="34" charset="-122"/>
                 <a:cs typeface="Hanken Grotesk" pitchFamily="34" charset="-120"/>
               </a:rPr>
-              <a:t>Expand 6(n + 3) using the distributive property.</a:t>
+              <a:t>Which expression represents 'the product of 6 and a number n'?</a:t>
             </a:r>
             <a:endParaRPr lang="en-US" sz="1050" dirty="0"/>
           </a:p>
@@ -8417,7 +8488,7 @@
                 <a:ea typeface="Hanken Grotesk" pitchFamily="34" charset="-122"/>
                 <a:cs typeface="Hanken Grotesk" pitchFamily="34" charset="-120"/>
               </a:rPr>
-              <a:t>Expand 4(5 − 2) using the distributive property.</a:t>
+              <a:t>Which expression represents '9 less than a number y'?</a:t>
             </a:r>
             <a:endParaRPr lang="en-US" sz="1050" dirty="0"/>
           </a:p>
@@ -8493,7 +8564,7 @@
                 <a:ea typeface="Hanken Grotesk" pitchFamily="34" charset="-122"/>
                 <a:cs typeface="Hanken Grotesk" pitchFamily="34" charset="-120"/>
               </a:rPr>
-              <a:t>Expand 3(x + 4) using the distributive property.</a:t>
+              <a:t>Which expression represents 'the sum of a number m and 15'?</a:t>
             </a:r>
             <a:endParaRPr lang="en-US" sz="1050" dirty="0"/>
           </a:p>
@@ -8630,7 +8701,7 @@
                 <a:ea typeface="Hanken Grotesk" pitchFamily="34" charset="-122"/>
                 <a:cs typeface="Hanken Grotesk" pitchFamily="34" charset="-120"/>
               </a:rPr>
-              <a:t>For 8 practice rooms each needing a music stand ($12) and a stool ($9), the cost is 8(12 + 9). How do you use the distributive property to find the total, and which form is easier for you?</a:t>
+              <a:t>A studio charges a $25 setup fee plus $8 per recording hour. With h hours, what expression models the cost, and what does each part represent?</a:t>
             </a:r>
             <a:endParaRPr lang="en-US" sz="1000" dirty="0"/>
           </a:p>
@@ -8918,7 +8989,7 @@
                 <a:ea typeface="Outfit" pitchFamily="34" charset="-122"/>
                 <a:cs typeface="Outfit" pitchFamily="34" charset="-120"/>
               </a:rPr>
-              <a:t>6.AT.7</a:t>
+              <a:t>6.AT.6a</a:t>
             </a:r>
             <a:endParaRPr lang="en-US" sz="900" dirty="0"/>
           </a:p>
@@ -9137,7 +9208,7 @@
                 <a:ea typeface="Hanken Grotesk" pitchFamily="34" charset="-122"/>
                 <a:cs typeface="Hanken Grotesk" pitchFamily="34" charset="-120"/>
               </a:rPr>
-              <a:t>Reveal Math Grade 6  ·  Unit 6  ·  Lesson 6-5</a:t>
+              <a:t>Reveal Math Grade 6  ·  Unit 6  ·  Lesson 6-3</a:t>
             </a:r>
             <a:endParaRPr lang="en-US" sz="750" dirty="0"/>
           </a:p>
@@ -9341,7 +9412,7 @@
                 <a:ea typeface="Hanken Grotesk" pitchFamily="34" charset="-122"/>
                 <a:cs typeface="Hanken Grotesk" pitchFamily="34" charset="-120"/>
               </a:rPr>
-              <a:t>Today's key idea is "The number outside the parentheses gets "shared" with every term inside." — and it works because ___.</a:t>
+              <a:t>Today's key idea is "Words like "each" or "per" mean multiply, and "plus" or "more than" mean add." — and it works because ___.</a:t>
             </a:r>
             <a:endParaRPr lang="en-US" sz="1050" dirty="0"/>
           </a:p>
@@ -9490,7 +9561,7 @@
                 <a:ea typeface="Hanken Grotesk" pitchFamily="34" charset="-122"/>
                 <a:cs typeface="Hanken Grotesk" pitchFamily="34" charset="-120"/>
               </a:rPr>
-              <a:t>Because Distributive Property means ___, but a tricky part is ___, so I have to ___.</a:t>
+              <a:t>Because Variable means ___, but a tricky part is ___, so I have to ___.</a:t>
             </a:r>
             <a:endParaRPr lang="en-US" sz="1050" dirty="0"/>
           </a:p>
@@ -9639,7 +9710,7 @@
                 <a:ea typeface="Hanken Grotesk" pitchFamily="34" charset="-122"/>
                 <a:cs typeface="Hanken Grotesk" pitchFamily="34" charset="-120"/>
               </a:rPr>
-              <a:t>A common mistake with Distributive Property is ___. It happens because ___, and the fix is ___.</a:t>
+              <a:t>A common mistake with Variable is ___. It happens because ___, and the fix is ___.</a:t>
             </a:r>
             <a:endParaRPr lang="en-US" sz="1050" dirty="0"/>
           </a:p>
@@ -9835,7 +9906,7 @@
                 <a:ea typeface="Outfit" pitchFamily="34" charset="-122"/>
                 <a:cs typeface="Outfit" pitchFamily="34" charset="-120"/>
               </a:rPr>
-              <a:t>6.AT.7</a:t>
+              <a:t>6.AT.6a</a:t>
             </a:r>
             <a:endParaRPr lang="en-US" sz="900" dirty="0"/>
           </a:p>
@@ -10054,7 +10125,7 @@
                 <a:ea typeface="Hanken Grotesk" pitchFamily="34" charset="-122"/>
                 <a:cs typeface="Hanken Grotesk" pitchFamily="34" charset="-120"/>
               </a:rPr>
-              <a:t>Reveal Math Grade 6  ·  Unit 6  ·  Lesson 6-5</a:t>
+              <a:t>Reveal Math Grade 6  ·  Unit 6  ·  Lesson 6-3</a:t>
             </a:r>
             <a:endParaRPr lang="en-US" sz="750" dirty="0"/>
           </a:p>
@@ -10512,7 +10583,7 @@
                 <a:ea typeface="Hanken Grotesk" pitchFamily="34" charset="-122"/>
                 <a:cs typeface="Hanken Grotesk" pitchFamily="34" charset="-120"/>
               </a:rPr>
-              <a:t>Which expression is equivalent to 7(x + 3)?</a:t>
+              <a:t>Which expression represents '3 more than twice a number n'?</a:t>
             </a:r>
             <a:endParaRPr lang="en-US" sz="1050" dirty="0"/>
           </a:p>
@@ -10551,7 +10622,7 @@
                 <a:ea typeface="Hanken Grotesk" pitchFamily="34" charset="-122"/>
                 <a:cs typeface="Hanken Grotesk" pitchFamily="34" charset="-120"/>
               </a:rPr>
-              <a:t>A.  7x + 21</a:t>
+              <a:t>A.  2n + 3</a:t>
             </a:r>
             <a:endParaRPr lang="en-US" sz="1000" dirty="0"/>
           </a:p>
@@ -10590,7 +10661,7 @@
                 <a:ea typeface="Hanken Grotesk" pitchFamily="34" charset="-122"/>
                 <a:cs typeface="Hanken Grotesk" pitchFamily="34" charset="-120"/>
               </a:rPr>
-              <a:t>B.  7x + 3</a:t>
+              <a:t>B.  3n + 2</a:t>
             </a:r>
             <a:endParaRPr lang="en-US" sz="1000" dirty="0"/>
           </a:p>
@@ -10629,7 +10700,7 @@
                 <a:ea typeface="Hanken Grotesk" pitchFamily="34" charset="-122"/>
                 <a:cs typeface="Hanken Grotesk" pitchFamily="34" charset="-120"/>
               </a:rPr>
-              <a:t>C.  x + 21</a:t>
+              <a:t>C.  2(n + 3)</a:t>
             </a:r>
             <a:endParaRPr lang="en-US" sz="1000" dirty="0"/>
           </a:p>
@@ -10668,7 +10739,7 @@
                 <a:ea typeface="Hanken Grotesk" pitchFamily="34" charset="-122"/>
                 <a:cs typeface="Hanken Grotesk" pitchFamily="34" charset="-120"/>
               </a:rPr>
-              <a:t>D.  7x + 10</a:t>
+              <a:t>D.  2 + 3n</a:t>
             </a:r>
             <a:endParaRPr lang="en-US" sz="1000" dirty="0"/>
           </a:p>
@@ -10963,7 +11034,7 @@
                 <a:ea typeface="Outfit" pitchFamily="34" charset="-122"/>
                 <a:cs typeface="Outfit" pitchFamily="34" charset="-120"/>
               </a:rPr>
-              <a:t>6.AT.7</a:t>
+              <a:t>6.AT.6a</a:t>
             </a:r>
             <a:endParaRPr lang="en-US" sz="900" dirty="0"/>
           </a:p>
@@ -11182,7 +11253,7 @@
                 <a:ea typeface="Hanken Grotesk" pitchFamily="34" charset="-122"/>
                 <a:cs typeface="Hanken Grotesk" pitchFamily="34" charset="-120"/>
               </a:rPr>
-              <a:t>Reveal Math Grade 6  ·  Unit 6  ·  Lesson 6-5</a:t>
+              <a:t>Reveal Math Grade 6  ·  Unit 6  ·  Lesson 6-3</a:t>
             </a:r>
             <a:endParaRPr lang="en-US" sz="750" dirty="0"/>
           </a:p>
@@ -11296,7 +11367,7 @@
                 <a:ea typeface="Hanken Grotesk" pitchFamily="34" charset="-122"/>
                 <a:cs typeface="Hanken Grotesk" pitchFamily="34" charset="-120"/>
               </a:rPr>
-              <a:t>I can use the distributive property to expand and factor expressions.</a:t>
+              <a:t>I can write algebraic expressions from words and real-world situations.</a:t>
             </a:r>
             <a:endParaRPr lang="en-US" sz="1100" dirty="0"/>
           </a:p>
@@ -12396,7 +12467,7 @@
                 <a:ea typeface="Outfit" pitchFamily="34" charset="-122"/>
                 <a:cs typeface="Outfit" pitchFamily="34" charset="-120"/>
               </a:rPr>
-              <a:t>6.AT.7</a:t>
+              <a:t>6.AT.6a</a:t>
             </a:r>
             <a:endParaRPr lang="en-US" sz="900" dirty="0"/>
           </a:p>
@@ -12615,7 +12686,7 @@
                 <a:ea typeface="Hanken Grotesk" pitchFamily="34" charset="-122"/>
                 <a:cs typeface="Hanken Grotesk" pitchFamily="34" charset="-120"/>
               </a:rPr>
-              <a:t>Reveal Math Grade 6  ·  Unit 6  ·  Lesson 6-5</a:t>
+              <a:t>Reveal Math Grade 6  ·  Unit 6  ·  Lesson 6-3</a:t>
             </a:r>
             <a:endParaRPr lang="en-US" sz="750" dirty="0"/>
           </a:p>
@@ -12865,7 +12936,7 @@
                 <a:ea typeface="Hanken Grotesk" pitchFamily="34" charset="-122"/>
                 <a:cs typeface="Hanken Grotesk" pitchFamily="34" charset="-120"/>
               </a:rPr>
-              <a:t>I can use the distributive property to expand and factor expressions.</a:t>
+              <a:t>I can write algebraic expressions from words and real-world situations.</a:t>
             </a:r>
             <a:endParaRPr lang="en-US" sz="1800" dirty="0"/>
           </a:p>
@@ -13037,7 +13108,7 @@
                 <a:ea typeface="Hanken Grotesk" pitchFamily="34" charset="-122"/>
                 <a:cs typeface="Hanken Grotesk" pitchFamily="34" charset="-120"/>
               </a:rPr>
-              <a:t>I can explain my steps using the words distributive property, factor, expand, and equivalent.</a:t>
+              <a:t>I can explain my expression using the words variable, coefficient, constant, and algebraic expression.</a:t>
             </a:r>
             <a:endParaRPr lang="en-US" sz="1700" dirty="0"/>
           </a:p>
@@ -13210,7 +13281,7 @@
                 <a:ea typeface="Outfit" pitchFamily="34" charset="-122"/>
                 <a:cs typeface="Outfit" pitchFamily="34" charset="-120"/>
               </a:rPr>
-              <a:t>6.AT.7</a:t>
+              <a:t>6.AT.6a</a:t>
             </a:r>
             <a:endParaRPr lang="en-US" sz="900" dirty="0"/>
           </a:p>
@@ -13429,7 +13500,7 @@
                 <a:ea typeface="Hanken Grotesk" pitchFamily="34" charset="-122"/>
                 <a:cs typeface="Hanken Grotesk" pitchFamily="34" charset="-120"/>
               </a:rPr>
-              <a:t>Reveal Math Grade 6  ·  Unit 6  ·  Lesson 6-5</a:t>
+              <a:t>Reveal Math Grade 6  ·  Unit 6  ·  Lesson 6-3</a:t>
             </a:r>
             <a:endParaRPr lang="en-US" sz="750" dirty="0"/>
           </a:p>
@@ -13626,7 +13697,7 @@
                 <a:ea typeface="Hanken Grotesk" pitchFamily="34" charset="-122"/>
                 <a:cs typeface="Hanken Grotesk" pitchFamily="34" charset="-120"/>
               </a:rPr>
-              <a:t>Each bundle is a ticket ($15) and a snack ($5). For 3 people, why does 3(15 + 5) give the same $60 as 3 × 15 + 3 × 5?</a:t>
+              <a:t>Tickets cost $12 each with a flat $50 venue fee. If t is the number of tickets, how would you write an expression for total revenue, and which part changes with the crowd?</a:t>
             </a:r>
             <a:endParaRPr lang="en-US" sz="1400" dirty="0"/>
           </a:p>
@@ -13956,7 +14027,7 @@
                 <a:ea typeface="Hanken Grotesk" pitchFamily="34" charset="-122"/>
                 <a:cs typeface="Hanken Grotesk" pitchFamily="34" charset="-120"/>
               </a:rPr>
-              <a:t>Distributive Property</a:t>
+              <a:t>Variable</a:t>
             </a:r>
             <a:endParaRPr lang="en-US" sz="900" dirty="0"/>
           </a:p>
@@ -14003,7 +14074,7 @@
                 <a:ea typeface="Hanken Grotesk" pitchFamily="34" charset="-122"/>
                 <a:cs typeface="Hanken Grotesk" pitchFamily="34" charset="-120"/>
               </a:rPr>
-              <a:t>Factor</a:t>
+              <a:t>Coefficient</a:t>
             </a:r>
             <a:endParaRPr lang="en-US" sz="900" dirty="0"/>
           </a:p>
@@ -14050,7 +14121,7 @@
                 <a:ea typeface="Hanken Grotesk" pitchFamily="34" charset="-122"/>
                 <a:cs typeface="Hanken Grotesk" pitchFamily="34" charset="-120"/>
               </a:rPr>
-              <a:t>Expand</a:t>
+              <a:t>Constant</a:t>
             </a:r>
             <a:endParaRPr lang="en-US" sz="900" dirty="0"/>
           </a:p>
@@ -14097,7 +14168,7 @@
                 <a:ea typeface="Hanken Grotesk" pitchFamily="34" charset="-122"/>
                 <a:cs typeface="Hanken Grotesk" pitchFamily="34" charset="-120"/>
               </a:rPr>
-              <a:t>Equivalent</a:t>
+              <a:t>Algebraic Expression</a:t>
             </a:r>
             <a:endParaRPr lang="en-US" sz="900" dirty="0"/>
           </a:p>
@@ -14270,7 +14341,7 @@
                 <a:ea typeface="Outfit" pitchFamily="34" charset="-122"/>
                 <a:cs typeface="Outfit" pitchFamily="34" charset="-120"/>
               </a:rPr>
-              <a:t>6.AT.7</a:t>
+              <a:t>6.AT.6a</a:t>
             </a:r>
             <a:endParaRPr lang="en-US" sz="900" dirty="0"/>
           </a:p>
@@ -14489,7 +14560,7 @@
                 <a:ea typeface="Hanken Grotesk" pitchFamily="34" charset="-122"/>
                 <a:cs typeface="Hanken Grotesk" pitchFamily="34" charset="-120"/>
               </a:rPr>
-              <a:t>Reveal Math Grade 6  ·  Unit 6  ·  Lesson 6-5</a:t>
+              <a:t>Reveal Math Grade 6  ·  Unit 6  ·  Lesson 6-3</a:t>
             </a:r>
             <a:endParaRPr lang="en-US" sz="750" dirty="0"/>
           </a:p>
@@ -14686,7 +14757,7 @@
                 <a:ea typeface="Hanken Grotesk" pitchFamily="34" charset="-122"/>
                 <a:cs typeface="Hanken Grotesk" pitchFamily="34" charset="-120"/>
               </a:rPr>
-              <a:t>When you expand 5(2x + 4), why must the 5 multiply BOTH terms inside the parentheses?</a:t>
+              <a:t>How do you turn words into an expression? Why does '12 less than a number g' become g − 12 and not 12 − g?</a:t>
             </a:r>
             <a:endParaRPr lang="en-US" sz="1400" dirty="0"/>
           </a:p>
@@ -15016,7 +15087,7 @@
                 <a:ea typeface="Hanken Grotesk" pitchFamily="34" charset="-122"/>
                 <a:cs typeface="Hanken Grotesk" pitchFamily="34" charset="-120"/>
               </a:rPr>
-              <a:t>Distributive Property</a:t>
+              <a:t>Algebraic Expression</a:t>
             </a:r>
             <a:endParaRPr lang="en-US" sz="900" dirty="0"/>
           </a:p>
@@ -15063,7 +15134,7 @@
                 <a:ea typeface="Hanken Grotesk" pitchFamily="34" charset="-122"/>
                 <a:cs typeface="Hanken Grotesk" pitchFamily="34" charset="-120"/>
               </a:rPr>
-              <a:t>Expand</a:t>
+              <a:t>Variable</a:t>
             </a:r>
             <a:endParaRPr lang="en-US" sz="900" dirty="0"/>
           </a:p>
@@ -15110,7 +15181,7 @@
                 <a:ea typeface="Hanken Grotesk" pitchFamily="34" charset="-122"/>
                 <a:cs typeface="Hanken Grotesk" pitchFamily="34" charset="-120"/>
               </a:rPr>
-              <a:t>Factor</a:t>
+              <a:t>Coefficient</a:t>
             </a:r>
             <a:endParaRPr lang="en-US" sz="900" dirty="0"/>
           </a:p>
@@ -15157,7 +15228,7 @@
                 <a:ea typeface="Hanken Grotesk" pitchFamily="34" charset="-122"/>
                 <a:cs typeface="Hanken Grotesk" pitchFamily="34" charset="-120"/>
               </a:rPr>
-              <a:t>Equivalent</a:t>
+              <a:t>Constant</a:t>
             </a:r>
             <a:endParaRPr lang="en-US" sz="900" dirty="0"/>
           </a:p>
@@ -15330,7 +15401,7 @@
                 <a:ea typeface="Outfit" pitchFamily="34" charset="-122"/>
                 <a:cs typeface="Outfit" pitchFamily="34" charset="-120"/>
               </a:rPr>
-              <a:t>6.AT.7</a:t>
+              <a:t>6.AT.6a</a:t>
             </a:r>
             <a:endParaRPr lang="en-US" sz="900" dirty="0"/>
           </a:p>
@@ -15549,7 +15620,7 @@
                 <a:ea typeface="Hanken Grotesk" pitchFamily="34" charset="-122"/>
                 <a:cs typeface="Hanken Grotesk" pitchFamily="34" charset="-120"/>
               </a:rPr>
-              <a:t>Reveal Math Grade 6  ·  Unit 6  ·  Lesson 6-5</a:t>
+              <a:t>Reveal Math Grade 6  ·  Unit 6  ·  Lesson 6-3</a:t>
             </a:r>
             <a:endParaRPr lang="en-US" sz="750" dirty="0"/>
           </a:p>
@@ -15746,7 +15817,7 @@
                 <a:ea typeface="Hanken Grotesk" pitchFamily="34" charset="-122"/>
                 <a:cs typeface="Hanken Grotesk" pitchFamily="34" charset="-120"/>
               </a:rPr>
-              <a:t>For 8 practice rooms each needing a music stand ($12) and a stool ($9), the cost is 8(12 + 9). How do you use the distributive property to find the total, and which form is easier for you?</a:t>
+              <a:t>A studio charges a $25 setup fee plus $8 per recording hour. With h hours, what expression models the cost, and what does each part represent?</a:t>
             </a:r>
             <a:endParaRPr lang="en-US" sz="1400" dirty="0"/>
           </a:p>
@@ -16076,7 +16147,7 @@
                 <a:ea typeface="Hanken Grotesk" pitchFamily="34" charset="-122"/>
                 <a:cs typeface="Hanken Grotesk" pitchFamily="34" charset="-120"/>
               </a:rPr>
-              <a:t>Distributive Property</a:t>
+              <a:t>Constant</a:t>
             </a:r>
             <a:endParaRPr lang="en-US" sz="900" dirty="0"/>
           </a:p>
@@ -16123,7 +16194,7 @@
                 <a:ea typeface="Hanken Grotesk" pitchFamily="34" charset="-122"/>
                 <a:cs typeface="Hanken Grotesk" pitchFamily="34" charset="-120"/>
               </a:rPr>
-              <a:t>Factor</a:t>
+              <a:t>Variable</a:t>
             </a:r>
             <a:endParaRPr lang="en-US" sz="900" dirty="0"/>
           </a:p>
@@ -16170,7 +16241,7 @@
                 <a:ea typeface="Hanken Grotesk" pitchFamily="34" charset="-122"/>
                 <a:cs typeface="Hanken Grotesk" pitchFamily="34" charset="-120"/>
               </a:rPr>
-              <a:t>Expand</a:t>
+              <a:t>Coefficient</a:t>
             </a:r>
             <a:endParaRPr lang="en-US" sz="900" dirty="0"/>
           </a:p>
@@ -16217,7 +16288,7 @@
                 <a:ea typeface="Hanken Grotesk" pitchFamily="34" charset="-122"/>
                 <a:cs typeface="Hanken Grotesk" pitchFamily="34" charset="-120"/>
               </a:rPr>
-              <a:t>Equivalent</a:t>
+              <a:t>Algebraic Expression</a:t>
             </a:r>
             <a:endParaRPr lang="en-US" sz="900" dirty="0"/>
           </a:p>
@@ -16390,7 +16461,7 @@
                 <a:ea typeface="Outfit" pitchFamily="34" charset="-122"/>
                 <a:cs typeface="Outfit" pitchFamily="34" charset="-120"/>
               </a:rPr>
-              <a:t>6.AT.7</a:t>
+              <a:t>6.AT.6a</a:t>
             </a:r>
             <a:endParaRPr lang="en-US" sz="900" dirty="0"/>
           </a:p>
@@ -16609,7 +16680,7 @@
                 <a:ea typeface="Hanken Grotesk" pitchFamily="34" charset="-122"/>
                 <a:cs typeface="Hanken Grotesk" pitchFamily="34" charset="-120"/>
               </a:rPr>
-              <a:t>Reveal Math Grade 6  ·  Unit 6  ·  Lesson 6-5</a:t>
+              <a:t>Reveal Math Grade 6  ·  Unit 6  ·  Lesson 6-3</a:t>
             </a:r>
             <a:endParaRPr lang="en-US" sz="750" dirty="0"/>
           </a:p>
@@ -16806,7 +16877,7 @@
                 <a:ea typeface="Hanken Grotesk" pitchFamily="34" charset="-122"/>
                 <a:cs typeface="Hanken Grotesk" pitchFamily="34" charset="-120"/>
               </a:rPr>
-              <a:t>During practice on The Distributive Property, what strategy did you use when a problem felt tricky?</a:t>
+              <a:t>During practice on Write Algebraic Expressions, what strategy did you use when a problem felt tricky?</a:t>
             </a:r>
             <a:endParaRPr lang="en-US" sz="1400" dirty="0"/>
           </a:p>
@@ -17136,7 +17207,7 @@
                 <a:ea typeface="Hanken Grotesk" pitchFamily="34" charset="-122"/>
                 <a:cs typeface="Hanken Grotesk" pitchFamily="34" charset="-120"/>
               </a:rPr>
-              <a:t>Distributive Property</a:t>
+              <a:t>Variable</a:t>
             </a:r>
             <a:endParaRPr lang="en-US" sz="900" dirty="0"/>
           </a:p>
@@ -17183,7 +17254,7 @@
                 <a:ea typeface="Hanken Grotesk" pitchFamily="34" charset="-122"/>
                 <a:cs typeface="Hanken Grotesk" pitchFamily="34" charset="-120"/>
               </a:rPr>
-              <a:t>Factor</a:t>
+              <a:t>Algebraic Expression</a:t>
             </a:r>
             <a:endParaRPr lang="en-US" sz="900" dirty="0"/>
           </a:p>
@@ -17230,7 +17301,7 @@
                 <a:ea typeface="Hanken Grotesk" pitchFamily="34" charset="-122"/>
                 <a:cs typeface="Hanken Grotesk" pitchFamily="34" charset="-120"/>
               </a:rPr>
-              <a:t>Expand</a:t>
+              <a:t>Coefficient</a:t>
             </a:r>
             <a:endParaRPr lang="en-US" sz="900" dirty="0"/>
           </a:p>
@@ -17277,7 +17348,7 @@
                 <a:ea typeface="Hanken Grotesk" pitchFamily="34" charset="-122"/>
                 <a:cs typeface="Hanken Grotesk" pitchFamily="34" charset="-120"/>
               </a:rPr>
-              <a:t>Equivalent</a:t>
+              <a:t>Constant</a:t>
             </a:r>
             <a:endParaRPr lang="en-US" sz="900" dirty="0"/>
           </a:p>
@@ -17450,7 +17521,7 @@
                 <a:ea typeface="Outfit" pitchFamily="34" charset="-122"/>
                 <a:cs typeface="Outfit" pitchFamily="34" charset="-120"/>
               </a:rPr>
-              <a:t>6.AT.7</a:t>
+              <a:t>6.AT.6a</a:t>
             </a:r>
             <a:endParaRPr lang="en-US" sz="900" dirty="0"/>
           </a:p>
@@ -17669,7 +17740,7 @@
                 <a:ea typeface="Hanken Grotesk" pitchFamily="34" charset="-122"/>
                 <a:cs typeface="Hanken Grotesk" pitchFamily="34" charset="-120"/>
               </a:rPr>
-              <a:t>Reveal Math Grade 6  ·  Unit 6  ·  Lesson 6-5</a:t>
+              <a:t>Reveal Math Grade 6  ·  Unit 6  ·  Lesson 6-3</a:t>
             </a:r>
             <a:endParaRPr lang="en-US" sz="750" dirty="0"/>
           </a:p>
@@ -17824,7 +17895,7 @@
                 <a:ea typeface="Outfit" pitchFamily="34" charset="-122"/>
                 <a:cs typeface="Outfit" pitchFamily="34" charset="-120"/>
               </a:rPr>
-              <a:t>Ticket Pricing</a:t>
+              <a:t>Concert Planner</a:t>
             </a:r>
             <a:endParaRPr lang="en-US" sz="1100" dirty="0"/>
           </a:p>
@@ -17863,7 +17934,7 @@
                 <a:ea typeface="Hanken Grotesk" pitchFamily="34" charset="-122"/>
                 <a:cs typeface="Hanken Grotesk" pitchFamily="34" charset="-120"/>
               </a:rPr>
-              <a:t>You're selling concert bundles at the music studio. Each bundle includes a ticket ($15) and a snack ($5). If 3 people each buy a bundle, you can calculate the total as 3(15 + 5) OR as 3 × 15 + 3 × 5. Either way, the total is the same — $60! This is the distributive property.</a:t>
+              <a:t>You're planning a concert at the music studio. Tickets cost $12 each, and there's a flat $50 venue fee no matter how many people attend. If t represents the number of tickets sold, how would you write an expression for the total revenue?</a:t>
             </a:r>
             <a:endParaRPr lang="en-US" sz="1150" dirty="0"/>
           </a:p>
@@ -18088,7 +18159,7 @@
                 <a:ea typeface="Hanken Grotesk" pitchFamily="34" charset="-122"/>
                 <a:cs typeface="Hanken Grotesk" pitchFamily="34" charset="-120"/>
               </a:rPr>
-              <a:t>•  Why do both methods give the same total?</a:t>
+              <a:t>•  What value changes depending on how many people come?</a:t>
             </a:r>
             <a:endParaRPr lang="en-US" sz="1000" dirty="0"/>
           </a:p>
@@ -18108,7 +18179,7 @@
                 <a:ea typeface="Hanken Grotesk" pitchFamily="34" charset="-122"/>
                 <a:cs typeface="Hanken Grotesk" pitchFamily="34" charset="-120"/>
               </a:rPr>
-              <a:t>•  What does the 3 represent in 3(15 + 5)?</a:t>
+              <a:t>•  What stays the same no matter the number of tickets?</a:t>
             </a:r>
             <a:endParaRPr lang="en-US" sz="1000" dirty="0"/>
           </a:p>
@@ -18128,7 +18199,7 @@
                 <a:ea typeface="Hanken Grotesk" pitchFamily="34" charset="-122"/>
                 <a:cs typeface="Hanken Grotesk" pitchFamily="34" charset="-120"/>
               </a:rPr>
-              <a:t>•  How is 3(15 + 5) related to 3 × 15 + 3 × 5?</a:t>
+              <a:t>•  How would you calculate the total if 10 tickets are sold?</a:t>
             </a:r>
             <a:endParaRPr lang="en-US" sz="1000" dirty="0"/>
           </a:p>
@@ -18245,7 +18316,7 @@
                 <a:ea typeface="Hanken Grotesk" pitchFamily="34" charset="-122"/>
                 <a:cs typeface="Hanken Grotesk" pitchFamily="34" charset="-120"/>
               </a:rPr>
-              <a:t>•  What if 10 people bought bundles — which way would be faster to calculate?</a:t>
+              <a:t>•  What if there were two different ticket prices — regular and VIP?</a:t>
             </a:r>
             <a:endParaRPr lang="en-US" sz="1000" dirty="0"/>
           </a:p>
@@ -18265,7 +18336,7 @@
                 <a:ea typeface="Hanken Grotesk" pitchFamily="34" charset="-122"/>
                 <a:cs typeface="Hanken Grotesk" pitchFamily="34" charset="-120"/>
               </a:rPr>
-              <a:t>•  Does this work with subtraction too, like 4(20 − 3)?</a:t>
+              <a:t>•  How many tickets would need to be sold to earn $200?</a:t>
             </a:r>
             <a:endParaRPr lang="en-US" sz="1000" dirty="0"/>
           </a:p>
@@ -18438,7 +18509,7 @@
                 <a:ea typeface="Outfit" pitchFamily="34" charset="-122"/>
                 <a:cs typeface="Outfit" pitchFamily="34" charset="-120"/>
               </a:rPr>
-              <a:t>6.AT.7</a:t>
+              <a:t>6.AT.6a</a:t>
             </a:r>
             <a:endParaRPr lang="en-US" sz="900" dirty="0"/>
           </a:p>
@@ -18657,7 +18728,7 @@
                 <a:ea typeface="Hanken Grotesk" pitchFamily="34" charset="-122"/>
                 <a:cs typeface="Hanken Grotesk" pitchFamily="34" charset="-120"/>
               </a:rPr>
-              <a:t>Reveal Math Grade 6  ·  Unit 6  ·  Lesson 6-5</a:t>
+              <a:t>Reveal Math Grade 6  ·  Unit 6  ·  Lesson 6-3</a:t>
             </a:r>
             <a:endParaRPr lang="en-US" sz="750" dirty="0"/>
           </a:p>
@@ -18953,7 +19024,7 @@
                           <a:ea typeface="Hanken Grotesk" pitchFamily="34" charset="-122"/>
                           <a:cs typeface="Hanken Grotesk" pitchFamily="34" charset="-120"/>
                         </a:rPr>
-                        <a:t>Distributive Property</a:t>
+                        <a:t>Variable</a:t>
                       </a:r>
                       <a:pPr indent="0" marL="0">
                         <a:buNone/>
@@ -18977,7 +19048,7 @@
                           <a:ea typeface="Hanken Grotesk" pitchFamily="34" charset="-122"/>
                           <a:cs typeface="Hanken Grotesk" pitchFamily="34" charset="-120"/>
                         </a:rPr>
-                        <a:t>Propiedad distributiva</a:t>
+                        <a:t>Variable</a:t>
                       </a:r>
                       <a:endParaRPr lang="en-US" sz="950" dirty="0">
                         <a:latin typeface="Hanken Grotesk" charset="0"/>
@@ -19045,7 +19116,7 @@
                           <a:ea typeface="Hanken Grotesk" pitchFamily="34" charset="-122"/>
                           <a:cs typeface="Hanken Grotesk" pitchFamily="34" charset="-120"/>
                         </a:rPr>
-                        <a:t>Multiplying a number by everything inside the parentheses: a(b + c) = ab + ac.</a:t>
+                        <a:t>A letter that stands for a number that is unknown or can change.</a:t>
                       </a:r>
                       <a:pPr indent="0" marL="0">
                         <a:buNone/>
@@ -19069,7 +19140,7 @@
                           <a:ea typeface="Hanken Grotesk" pitchFamily="34" charset="-122"/>
                           <a:cs typeface="Hanken Grotesk" pitchFamily="34" charset="-120"/>
                         </a:rPr>
-                        <a:t>Multiplicar un número por todo lo que está dentro del paréntesis: a(b + c) = ab + ac.</a:t>
+                        <a:t>Una letra que representa un número desconocido o que puede cambiar.</a:t>
                       </a:r>
                       <a:endParaRPr lang="en-US" sz="900" dirty="0">
                         <a:latin typeface="Hanken Grotesk" charset="0"/>
@@ -19137,7 +19208,7 @@
                           <a:ea typeface="Hanken Grotesk" pitchFamily="34" charset="-122"/>
                           <a:cs typeface="Hanken Grotesk" pitchFamily="34" charset="-120"/>
                         </a:rPr>
-                        <a:t>3(4 + 5) = 3×4 + 3×5 = 12 + 15 = 27 — the 3 gets 'distributed' to both the 4 and the 5</a:t>
+                        <a:t>In 5t + 20, t could be hours worked — if t = 3, the expression equals 35; if t = 8, it equals 60</a:t>
                       </a:r>
                       <a:endParaRPr lang="en-US" sz="900" dirty="0">
                         <a:latin typeface="Hanken Grotesk" charset="0"/>
@@ -19207,7 +19278,7 @@
                           <a:ea typeface="Hanken Grotesk" pitchFamily="34" charset="-122"/>
                           <a:cs typeface="Hanken Grotesk" pitchFamily="34" charset="-120"/>
                         </a:rPr>
-                        <a:t>Factor</a:t>
+                        <a:t>Algebraic Expression</a:t>
                       </a:r>
                       <a:pPr indent="0" marL="0">
                         <a:buNone/>
@@ -19231,7 +19302,7 @@
                           <a:ea typeface="Hanken Grotesk" pitchFamily="34" charset="-122"/>
                           <a:cs typeface="Hanken Grotesk" pitchFamily="34" charset="-120"/>
                         </a:rPr>
-                        <a:t>Factor</a:t>
+                        <a:t>Expresión algebraica</a:t>
                       </a:r>
                       <a:endParaRPr lang="en-US" sz="950" dirty="0">
                         <a:latin typeface="Hanken Grotesk" charset="0"/>
@@ -19299,7 +19370,7 @@
                           <a:ea typeface="Hanken Grotesk" pitchFamily="34" charset="-122"/>
                           <a:cs typeface="Hanken Grotesk" pitchFamily="34" charset="-120"/>
                         </a:rPr>
-                        <a:t>A number that gets multiplied by another number.</a:t>
+                        <a:t>A math phrase that has at least one letter.</a:t>
                       </a:r>
                       <a:pPr indent="0" marL="0">
                         <a:buNone/>
@@ -19323,7 +19394,7 @@
                           <a:ea typeface="Hanken Grotesk" pitchFamily="34" charset="-122"/>
                           <a:cs typeface="Hanken Grotesk" pitchFamily="34" charset="-120"/>
                         </a:rPr>
-                        <a:t>Un número que se multiplica por otro número.</a:t>
+                        <a:t>Una frase matemática que tiene al menos una letra.</a:t>
                       </a:r>
                       <a:endParaRPr lang="en-US" sz="900" dirty="0">
                         <a:latin typeface="Hanken Grotesk" charset="0"/>
@@ -19391,515 +19462,7 @@
                           <a:ea typeface="Hanken Grotesk" pitchFamily="34" charset="-122"/>
                           <a:cs typeface="Hanken Grotesk" pitchFamily="34" charset="-120"/>
                         </a:rPr>
-                        <a:t>In 3(x + 2), the 3 is the factor outside the parentheses that multiplies each term inside</a:t>
-                      </a:r>
-                      <a:endParaRPr lang="en-US" sz="900" dirty="0">
-                        <a:latin typeface="Hanken Grotesk" charset="0"/>
-                        <a:ea typeface="Hanken Grotesk" charset="0"/>
-                        <a:cs typeface="Hanken Grotesk" charset="0"/>
-                      </a:endParaRPr>
-                    </a:p>
-                  </a:txBody>
-                  <a:tcPr marL="91440" marR="91440" marT="45720" marB="45720" anchor="ctr">
-                    <a:lnL w="9525" cap="flat" cmpd="sng" algn="ctr">
-                      <a:solidFill>
-                        <a:srgbClr val="D6DBDF"/>
-                      </a:solidFill>
-                      <a:prstDash val="solid"/>
-                      <a:round/>
-                      <a:headEnd type="none" w="med" len="med"/>
-                      <a:tailEnd type="none" w="med" len="med"/>
-                    </a:lnL>
-                    <a:lnR w="9525" cap="flat" cmpd="sng" algn="ctr">
-                      <a:solidFill>
-                        <a:srgbClr val="D6DBDF"/>
-                      </a:solidFill>
-                      <a:prstDash val="solid"/>
-                      <a:round/>
-                      <a:headEnd type="none" w="med" len="med"/>
-                      <a:tailEnd type="none" w="med" len="med"/>
-                    </a:lnR>
-                    <a:lnT w="9525" cap="flat" cmpd="sng" algn="ctr">
-                      <a:solidFill>
-                        <a:srgbClr val="D6DBDF"/>
-                      </a:solidFill>
-                      <a:prstDash val="solid"/>
-                      <a:round/>
-                      <a:headEnd type="none" w="med" len="med"/>
-                      <a:tailEnd type="none" w="med" len="med"/>
-                    </a:lnT>
-                    <a:lnB w="9525" cap="flat" cmpd="sng" algn="ctr">
-                      <a:solidFill>
-                        <a:srgbClr val="D6DBDF"/>
-                      </a:solidFill>
-                      <a:prstDash val="solid"/>
-                      <a:round/>
-                      <a:headEnd type="none" w="med" len="med"/>
-                      <a:tailEnd type="none" w="med" len="med"/>
-                    </a:lnB>
-                    <a:solidFill>
-                      <a:srgbClr val="F4F1E8"/>
-                    </a:solidFill>
-                  </a:tcPr>
-                </a:tc>
-              </a:tr>
-              <a:tr h="457200">
-                <a:tc>
-                  <a:txBody>
-                    <a:bodyPr/>
-                    <a:lstStyle/>
-                    <a:p>
-                      <a:pPr indent="0" marL="0">
-                        <a:buNone/>
-                      </a:pPr>
-                      <a:r>
-                        <a:rPr lang="en-US" sz="950" b="1" dirty="0">
-                          <a:solidFill>
-                            <a:srgbClr val="17324D"/>
-                          </a:solidFill>
-                          <a:latin typeface="Hanken Grotesk" pitchFamily="34" charset="0"/>
-                          <a:ea typeface="Hanken Grotesk" pitchFamily="34" charset="-122"/>
-                          <a:cs typeface="Hanken Grotesk" pitchFamily="34" charset="-120"/>
-                        </a:rPr>
-                        <a:t>Expand</a:t>
-                      </a:r>
-                      <a:pPr indent="0" marL="0">
-                        <a:buNone/>
-                      </a:pPr>
-                      <a:endParaRPr lang="en-US" sz="950" dirty="0">
-                        <a:latin typeface="Hanken Grotesk" charset="0"/>
-                        <a:ea typeface="Hanken Grotesk" charset="0"/>
-                        <a:cs typeface="Hanken Grotesk" charset="0"/>
-                      </a:endParaRPr>
-                    </a:p>
-                    <a:p>
-                      <a:pPr indent="0" marL="0">
-                        <a:buNone/>
-                      </a:pPr>
-                      <a:r>
-                        <a:rPr lang="en-US" sz="850" i="1" dirty="0">
-                          <a:solidFill>
-                            <a:srgbClr val="8A96A3"/>
-                          </a:solidFill>
-                          <a:latin typeface="Hanken Grotesk" pitchFamily="34" charset="0"/>
-                          <a:ea typeface="Hanken Grotesk" pitchFamily="34" charset="-122"/>
-                          <a:cs typeface="Hanken Grotesk" pitchFamily="34" charset="-120"/>
-                        </a:rPr>
-                        <a:t>Desarrollar</a:t>
-                      </a:r>
-                      <a:endParaRPr lang="en-US" sz="950" dirty="0">
-                        <a:latin typeface="Hanken Grotesk" charset="0"/>
-                        <a:ea typeface="Hanken Grotesk" charset="0"/>
-                        <a:cs typeface="Hanken Grotesk" charset="0"/>
-                      </a:endParaRPr>
-                    </a:p>
-                  </a:txBody>
-                  <a:tcPr marL="91440" marR="91440" marT="45720" marB="45720" anchor="ctr">
-                    <a:lnL w="9525" cap="flat" cmpd="sng" algn="ctr">
-                      <a:solidFill>
-                        <a:srgbClr val="D6DBDF"/>
-                      </a:solidFill>
-                      <a:prstDash val="solid"/>
-                      <a:round/>
-                      <a:headEnd type="none" w="med" len="med"/>
-                      <a:tailEnd type="none" w="med" len="med"/>
-                    </a:lnL>
-                    <a:lnR w="9525" cap="flat" cmpd="sng" algn="ctr">
-                      <a:solidFill>
-                        <a:srgbClr val="D6DBDF"/>
-                      </a:solidFill>
-                      <a:prstDash val="solid"/>
-                      <a:round/>
-                      <a:headEnd type="none" w="med" len="med"/>
-                      <a:tailEnd type="none" w="med" len="med"/>
-                    </a:lnR>
-                    <a:lnT w="9525" cap="flat" cmpd="sng" algn="ctr">
-                      <a:solidFill>
-                        <a:srgbClr val="D6DBDF"/>
-                      </a:solidFill>
-                      <a:prstDash val="solid"/>
-                      <a:round/>
-                      <a:headEnd type="none" w="med" len="med"/>
-                      <a:tailEnd type="none" w="med" len="med"/>
-                    </a:lnT>
-                    <a:lnB w="9525" cap="flat" cmpd="sng" algn="ctr">
-                      <a:solidFill>
-                        <a:srgbClr val="D6DBDF"/>
-                      </a:solidFill>
-                      <a:prstDash val="solid"/>
-                      <a:round/>
-                      <a:headEnd type="none" w="med" len="med"/>
-                      <a:tailEnd type="none" w="med" len="med"/>
-                    </a:lnB>
-                    <a:solidFill>
-                      <a:srgbClr val="FFFFFF"/>
-                    </a:solidFill>
-                  </a:tcPr>
-                </a:tc>
-                <a:tc>
-                  <a:txBody>
-                    <a:bodyPr/>
-                    <a:lstStyle/>
-                    <a:p>
-                      <a:pPr indent="0" marL="0">
-                        <a:buNone/>
-                      </a:pPr>
-                      <a:r>
-                        <a:rPr lang="en-US" sz="900" dirty="0">
-                          <a:solidFill>
-                            <a:srgbClr val="24323F"/>
-                          </a:solidFill>
-                          <a:latin typeface="Hanken Grotesk" pitchFamily="34" charset="0"/>
-                          <a:ea typeface="Hanken Grotesk" pitchFamily="34" charset="-122"/>
-                          <a:cs typeface="Hanken Grotesk" pitchFamily="34" charset="-120"/>
-                        </a:rPr>
-                        <a:t>To multiply out the parentheses in an expression.</a:t>
-                      </a:r>
-                      <a:pPr indent="0" marL="0">
-                        <a:buNone/>
-                      </a:pPr>
-                      <a:endParaRPr lang="en-US" sz="900" dirty="0">
-                        <a:latin typeface="Hanken Grotesk" charset="0"/>
-                        <a:ea typeface="Hanken Grotesk" charset="0"/>
-                        <a:cs typeface="Hanken Grotesk" charset="0"/>
-                      </a:endParaRPr>
-                    </a:p>
-                    <a:p>
-                      <a:pPr indent="0" marL="0">
-                        <a:buNone/>
-                      </a:pPr>
-                      <a:r>
-                        <a:rPr lang="en-US" sz="850" i="1" dirty="0">
-                          <a:solidFill>
-                            <a:srgbClr val="8A96A3"/>
-                          </a:solidFill>
-                          <a:latin typeface="Hanken Grotesk" pitchFamily="34" charset="0"/>
-                          <a:ea typeface="Hanken Grotesk" pitchFamily="34" charset="-122"/>
-                          <a:cs typeface="Hanken Grotesk" pitchFamily="34" charset="-120"/>
-                        </a:rPr>
-                        <a:t>Multiplicar lo que está dentro del paréntesis en una expresión.</a:t>
-                      </a:r>
-                      <a:endParaRPr lang="en-US" sz="900" dirty="0">
-                        <a:latin typeface="Hanken Grotesk" charset="0"/>
-                        <a:ea typeface="Hanken Grotesk" charset="0"/>
-                        <a:cs typeface="Hanken Grotesk" charset="0"/>
-                      </a:endParaRPr>
-                    </a:p>
-                  </a:txBody>
-                  <a:tcPr marL="91440" marR="91440" marT="45720" marB="45720" anchor="ctr">
-                    <a:lnL w="9525" cap="flat" cmpd="sng" algn="ctr">
-                      <a:solidFill>
-                        <a:srgbClr val="D6DBDF"/>
-                      </a:solidFill>
-                      <a:prstDash val="solid"/>
-                      <a:round/>
-                      <a:headEnd type="none" w="med" len="med"/>
-                      <a:tailEnd type="none" w="med" len="med"/>
-                    </a:lnL>
-                    <a:lnR w="9525" cap="flat" cmpd="sng" algn="ctr">
-                      <a:solidFill>
-                        <a:srgbClr val="D6DBDF"/>
-                      </a:solidFill>
-                      <a:prstDash val="solid"/>
-                      <a:round/>
-                      <a:headEnd type="none" w="med" len="med"/>
-                      <a:tailEnd type="none" w="med" len="med"/>
-                    </a:lnR>
-                    <a:lnT w="9525" cap="flat" cmpd="sng" algn="ctr">
-                      <a:solidFill>
-                        <a:srgbClr val="D6DBDF"/>
-                      </a:solidFill>
-                      <a:prstDash val="solid"/>
-                      <a:round/>
-                      <a:headEnd type="none" w="med" len="med"/>
-                      <a:tailEnd type="none" w="med" len="med"/>
-                    </a:lnT>
-                    <a:lnB w="9525" cap="flat" cmpd="sng" algn="ctr">
-                      <a:solidFill>
-                        <a:srgbClr val="D6DBDF"/>
-                      </a:solidFill>
-                      <a:prstDash val="solid"/>
-                      <a:round/>
-                      <a:headEnd type="none" w="med" len="med"/>
-                      <a:tailEnd type="none" w="med" len="med"/>
-                    </a:lnB>
-                    <a:solidFill>
-                      <a:srgbClr val="FFFFFF"/>
-                    </a:solidFill>
-                  </a:tcPr>
-                </a:tc>
-                <a:tc>
-                  <a:txBody>
-                    <a:bodyPr/>
-                    <a:lstStyle/>
-                    <a:p>
-                      <a:pPr indent="0" marL="0">
-                        <a:buNone/>
-                      </a:pPr>
-                      <a:r>
-                        <a:rPr lang="en-US" sz="900" i="1" dirty="0">
-                          <a:solidFill>
-                            <a:srgbClr val="24323F"/>
-                          </a:solidFill>
-                          <a:latin typeface="Hanken Grotesk" pitchFamily="34" charset="0"/>
-                          <a:ea typeface="Hanken Grotesk" pitchFamily="34" charset="-122"/>
-                          <a:cs typeface="Hanken Grotesk" pitchFamily="34" charset="-120"/>
-                        </a:rPr>
-                        <a:t>Expand 2(n + 6): multiply 2 × n = 2n and 2 × 6 = 12, so 2(n + 6) = 2n + 12</a:t>
-                      </a:r>
-                      <a:endParaRPr lang="en-US" sz="900" dirty="0">
-                        <a:latin typeface="Hanken Grotesk" charset="0"/>
-                        <a:ea typeface="Hanken Grotesk" charset="0"/>
-                        <a:cs typeface="Hanken Grotesk" charset="0"/>
-                      </a:endParaRPr>
-                    </a:p>
-                  </a:txBody>
-                  <a:tcPr marL="91440" marR="91440" marT="45720" marB="45720" anchor="ctr">
-                    <a:lnL w="9525" cap="flat" cmpd="sng" algn="ctr">
-                      <a:solidFill>
-                        <a:srgbClr val="D6DBDF"/>
-                      </a:solidFill>
-                      <a:prstDash val="solid"/>
-                      <a:round/>
-                      <a:headEnd type="none" w="med" len="med"/>
-                      <a:tailEnd type="none" w="med" len="med"/>
-                    </a:lnL>
-                    <a:lnR w="9525" cap="flat" cmpd="sng" algn="ctr">
-                      <a:solidFill>
-                        <a:srgbClr val="D6DBDF"/>
-                      </a:solidFill>
-                      <a:prstDash val="solid"/>
-                      <a:round/>
-                      <a:headEnd type="none" w="med" len="med"/>
-                      <a:tailEnd type="none" w="med" len="med"/>
-                    </a:lnR>
-                    <a:lnT w="9525" cap="flat" cmpd="sng" algn="ctr">
-                      <a:solidFill>
-                        <a:srgbClr val="D6DBDF"/>
-                      </a:solidFill>
-                      <a:prstDash val="solid"/>
-                      <a:round/>
-                      <a:headEnd type="none" w="med" len="med"/>
-                      <a:tailEnd type="none" w="med" len="med"/>
-                    </a:lnT>
-                    <a:lnB w="9525" cap="flat" cmpd="sng" algn="ctr">
-                      <a:solidFill>
-                        <a:srgbClr val="D6DBDF"/>
-                      </a:solidFill>
-                      <a:prstDash val="solid"/>
-                      <a:round/>
-                      <a:headEnd type="none" w="med" len="med"/>
-                      <a:tailEnd type="none" w="med" len="med"/>
-                    </a:lnB>
-                    <a:solidFill>
-                      <a:srgbClr val="FFFFFF"/>
-                    </a:solidFill>
-                  </a:tcPr>
-                </a:tc>
-              </a:tr>
-              <a:tr h="457200">
-                <a:tc>
-                  <a:txBody>
-                    <a:bodyPr/>
-                    <a:lstStyle/>
-                    <a:p>
-                      <a:pPr indent="0" marL="0">
-                        <a:buNone/>
-                      </a:pPr>
-                      <a:r>
-                        <a:rPr lang="en-US" sz="950" b="1" dirty="0">
-                          <a:solidFill>
-                            <a:srgbClr val="17324D"/>
-                          </a:solidFill>
-                          <a:latin typeface="Hanken Grotesk" pitchFamily="34" charset="0"/>
-                          <a:ea typeface="Hanken Grotesk" pitchFamily="34" charset="-122"/>
-                          <a:cs typeface="Hanken Grotesk" pitchFamily="34" charset="-120"/>
-                        </a:rPr>
-                        <a:t>Equivalent</a:t>
-                      </a:r>
-                      <a:pPr indent="0" marL="0">
-                        <a:buNone/>
-                      </a:pPr>
-                      <a:endParaRPr lang="en-US" sz="950" dirty="0">
-                        <a:latin typeface="Hanken Grotesk" charset="0"/>
-                        <a:ea typeface="Hanken Grotesk" charset="0"/>
-                        <a:cs typeface="Hanken Grotesk" charset="0"/>
-                      </a:endParaRPr>
-                    </a:p>
-                    <a:p>
-                      <a:pPr indent="0" marL="0">
-                        <a:buNone/>
-                      </a:pPr>
-                      <a:r>
-                        <a:rPr lang="en-US" sz="850" i="1" dirty="0">
-                          <a:solidFill>
-                            <a:srgbClr val="8A96A3"/>
-                          </a:solidFill>
-                          <a:latin typeface="Hanken Grotesk" pitchFamily="34" charset="0"/>
-                          <a:ea typeface="Hanken Grotesk" pitchFamily="34" charset="-122"/>
-                          <a:cs typeface="Hanken Grotesk" pitchFamily="34" charset="-120"/>
-                        </a:rPr>
-                        <a:t>Equivalente</a:t>
-                      </a:r>
-                      <a:endParaRPr lang="en-US" sz="950" dirty="0">
-                        <a:latin typeface="Hanken Grotesk" charset="0"/>
-                        <a:ea typeface="Hanken Grotesk" charset="0"/>
-                        <a:cs typeface="Hanken Grotesk" charset="0"/>
-                      </a:endParaRPr>
-                    </a:p>
-                  </a:txBody>
-                  <a:tcPr marL="91440" marR="91440" marT="45720" marB="45720" anchor="ctr">
-                    <a:lnL w="9525" cap="flat" cmpd="sng" algn="ctr">
-                      <a:solidFill>
-                        <a:srgbClr val="D6DBDF"/>
-                      </a:solidFill>
-                      <a:prstDash val="solid"/>
-                      <a:round/>
-                      <a:headEnd type="none" w="med" len="med"/>
-                      <a:tailEnd type="none" w="med" len="med"/>
-                    </a:lnL>
-                    <a:lnR w="9525" cap="flat" cmpd="sng" algn="ctr">
-                      <a:solidFill>
-                        <a:srgbClr val="D6DBDF"/>
-                      </a:solidFill>
-                      <a:prstDash val="solid"/>
-                      <a:round/>
-                      <a:headEnd type="none" w="med" len="med"/>
-                      <a:tailEnd type="none" w="med" len="med"/>
-                    </a:lnR>
-                    <a:lnT w="9525" cap="flat" cmpd="sng" algn="ctr">
-                      <a:solidFill>
-                        <a:srgbClr val="D6DBDF"/>
-                      </a:solidFill>
-                      <a:prstDash val="solid"/>
-                      <a:round/>
-                      <a:headEnd type="none" w="med" len="med"/>
-                      <a:tailEnd type="none" w="med" len="med"/>
-                    </a:lnT>
-                    <a:lnB w="9525" cap="flat" cmpd="sng" algn="ctr">
-                      <a:solidFill>
-                        <a:srgbClr val="D6DBDF"/>
-                      </a:solidFill>
-                      <a:prstDash val="solid"/>
-                      <a:round/>
-                      <a:headEnd type="none" w="med" len="med"/>
-                      <a:tailEnd type="none" w="med" len="med"/>
-                    </a:lnB>
-                    <a:solidFill>
-                      <a:srgbClr val="F4F1E8"/>
-                    </a:solidFill>
-                  </a:tcPr>
-                </a:tc>
-                <a:tc>
-                  <a:txBody>
-                    <a:bodyPr/>
-                    <a:lstStyle/>
-                    <a:p>
-                      <a:pPr indent="0" marL="0">
-                        <a:buNone/>
-                      </a:pPr>
-                      <a:r>
-                        <a:rPr lang="en-US" sz="900" dirty="0">
-                          <a:solidFill>
-                            <a:srgbClr val="24323F"/>
-                          </a:solidFill>
-                          <a:latin typeface="Hanken Grotesk" pitchFamily="34" charset="0"/>
-                          <a:ea typeface="Hanken Grotesk" pitchFamily="34" charset="-122"/>
-                          <a:cs typeface="Hanken Grotesk" pitchFamily="34" charset="-120"/>
-                        </a:rPr>
-                        <a:t>Expressions that always have the same value.</a:t>
-                      </a:r>
-                      <a:pPr indent="0" marL="0">
-                        <a:buNone/>
-                      </a:pPr>
-                      <a:endParaRPr lang="en-US" sz="900" dirty="0">
-                        <a:latin typeface="Hanken Grotesk" charset="0"/>
-                        <a:ea typeface="Hanken Grotesk" charset="0"/>
-                        <a:cs typeface="Hanken Grotesk" charset="0"/>
-                      </a:endParaRPr>
-                    </a:p>
-                    <a:p>
-                      <a:pPr indent="0" marL="0">
-                        <a:buNone/>
-                      </a:pPr>
-                      <a:r>
-                        <a:rPr lang="en-US" sz="850" i="1" dirty="0">
-                          <a:solidFill>
-                            <a:srgbClr val="8A96A3"/>
-                          </a:solidFill>
-                          <a:latin typeface="Hanken Grotesk" pitchFamily="34" charset="0"/>
-                          <a:ea typeface="Hanken Grotesk" pitchFamily="34" charset="-122"/>
-                          <a:cs typeface="Hanken Grotesk" pitchFamily="34" charset="-120"/>
-                        </a:rPr>
-                        <a:t>Expresiones que siempre tienen el mismo valor.</a:t>
-                      </a:r>
-                      <a:endParaRPr lang="en-US" sz="900" dirty="0">
-                        <a:latin typeface="Hanken Grotesk" charset="0"/>
-                        <a:ea typeface="Hanken Grotesk" charset="0"/>
-                        <a:cs typeface="Hanken Grotesk" charset="0"/>
-                      </a:endParaRPr>
-                    </a:p>
-                  </a:txBody>
-                  <a:tcPr marL="91440" marR="91440" marT="45720" marB="45720" anchor="ctr">
-                    <a:lnL w="9525" cap="flat" cmpd="sng" algn="ctr">
-                      <a:solidFill>
-                        <a:srgbClr val="D6DBDF"/>
-                      </a:solidFill>
-                      <a:prstDash val="solid"/>
-                      <a:round/>
-                      <a:headEnd type="none" w="med" len="med"/>
-                      <a:tailEnd type="none" w="med" len="med"/>
-                    </a:lnL>
-                    <a:lnR w="9525" cap="flat" cmpd="sng" algn="ctr">
-                      <a:solidFill>
-                        <a:srgbClr val="D6DBDF"/>
-                      </a:solidFill>
-                      <a:prstDash val="solid"/>
-                      <a:round/>
-                      <a:headEnd type="none" w="med" len="med"/>
-                      <a:tailEnd type="none" w="med" len="med"/>
-                    </a:lnR>
-                    <a:lnT w="9525" cap="flat" cmpd="sng" algn="ctr">
-                      <a:solidFill>
-                        <a:srgbClr val="D6DBDF"/>
-                      </a:solidFill>
-                      <a:prstDash val="solid"/>
-                      <a:round/>
-                      <a:headEnd type="none" w="med" len="med"/>
-                      <a:tailEnd type="none" w="med" len="med"/>
-                    </a:lnT>
-                    <a:lnB w="9525" cap="flat" cmpd="sng" algn="ctr">
-                      <a:solidFill>
-                        <a:srgbClr val="D6DBDF"/>
-                      </a:solidFill>
-                      <a:prstDash val="solid"/>
-                      <a:round/>
-                      <a:headEnd type="none" w="med" len="med"/>
-                      <a:tailEnd type="none" w="med" len="med"/>
-                    </a:lnB>
-                    <a:solidFill>
-                      <a:srgbClr val="F4F1E8"/>
-                    </a:solidFill>
-                  </a:tcPr>
-                </a:tc>
-                <a:tc>
-                  <a:txBody>
-                    <a:bodyPr/>
-                    <a:lstStyle/>
-                    <a:p>
-                      <a:pPr indent="0" marL="0">
-                        <a:buNone/>
-                      </a:pPr>
-                      <a:r>
-                        <a:rPr lang="en-US" sz="900" i="1" dirty="0">
-                          <a:solidFill>
-                            <a:srgbClr val="24323F"/>
-                          </a:solidFill>
-                          <a:latin typeface="Hanken Grotesk" pitchFamily="34" charset="0"/>
-                          <a:ea typeface="Hanken Grotesk" pitchFamily="34" charset="-122"/>
-                          <a:cs typeface="Hanken Grotesk" pitchFamily="34" charset="-120"/>
-                        </a:rPr>
-                        <a:t>3(x + 4) and 3x + 12 always give the same answer: when x = 2, both = 18; when x = 10, both = 42</a:t>
+                        <a:t>3n + 7 means 'triple a number, then add 7' — it has a variable (n), a coefficient (3), and a constant (7)</a:t>
                       </a:r>
                       <a:endParaRPr lang="en-US" sz="900" dirty="0">
                         <a:latin typeface="Hanken Grotesk" charset="0"/>
@@ -20153,7 +19716,515 @@
                           <a:ea typeface="Hanken Grotesk" pitchFamily="34" charset="-122"/>
                           <a:cs typeface="Hanken Grotesk" pitchFamily="34" charset="-120"/>
                         </a:rPr>
-                        <a:t>In 6x + 15, the coefficient of x is 6 — it came from distributing in 3(2x + 5)</a:t>
+                        <a:t>In 8x, the coefficient 8 means '8 groups of x' — if x = 3, then 8x = 8 × 3 = 24</a:t>
+                      </a:r>
+                      <a:endParaRPr lang="en-US" sz="900" dirty="0">
+                        <a:latin typeface="Hanken Grotesk" charset="0"/>
+                        <a:ea typeface="Hanken Grotesk" charset="0"/>
+                        <a:cs typeface="Hanken Grotesk" charset="0"/>
+                      </a:endParaRPr>
+                    </a:p>
+                  </a:txBody>
+                  <a:tcPr marL="91440" marR="91440" marT="45720" marB="45720" anchor="ctr">
+                    <a:lnL w="9525" cap="flat" cmpd="sng" algn="ctr">
+                      <a:solidFill>
+                        <a:srgbClr val="D6DBDF"/>
+                      </a:solidFill>
+                      <a:prstDash val="solid"/>
+                      <a:round/>
+                      <a:headEnd type="none" w="med" len="med"/>
+                      <a:tailEnd type="none" w="med" len="med"/>
+                    </a:lnL>
+                    <a:lnR w="9525" cap="flat" cmpd="sng" algn="ctr">
+                      <a:solidFill>
+                        <a:srgbClr val="D6DBDF"/>
+                      </a:solidFill>
+                      <a:prstDash val="solid"/>
+                      <a:round/>
+                      <a:headEnd type="none" w="med" len="med"/>
+                      <a:tailEnd type="none" w="med" len="med"/>
+                    </a:lnR>
+                    <a:lnT w="9525" cap="flat" cmpd="sng" algn="ctr">
+                      <a:solidFill>
+                        <a:srgbClr val="D6DBDF"/>
+                      </a:solidFill>
+                      <a:prstDash val="solid"/>
+                      <a:round/>
+                      <a:headEnd type="none" w="med" len="med"/>
+                      <a:tailEnd type="none" w="med" len="med"/>
+                    </a:lnT>
+                    <a:lnB w="9525" cap="flat" cmpd="sng" algn="ctr">
+                      <a:solidFill>
+                        <a:srgbClr val="D6DBDF"/>
+                      </a:solidFill>
+                      <a:prstDash val="solid"/>
+                      <a:round/>
+                      <a:headEnd type="none" w="med" len="med"/>
+                      <a:tailEnd type="none" w="med" len="med"/>
+                    </a:lnB>
+                    <a:solidFill>
+                      <a:srgbClr val="FFFFFF"/>
+                    </a:solidFill>
+                  </a:tcPr>
+                </a:tc>
+              </a:tr>
+              <a:tr h="457200">
+                <a:tc>
+                  <a:txBody>
+                    <a:bodyPr/>
+                    <a:lstStyle/>
+                    <a:p>
+                      <a:pPr indent="0" marL="0">
+                        <a:buNone/>
+                      </a:pPr>
+                      <a:r>
+                        <a:rPr lang="en-US" sz="950" b="1" dirty="0">
+                          <a:solidFill>
+                            <a:srgbClr val="17324D"/>
+                          </a:solidFill>
+                          <a:latin typeface="Hanken Grotesk" pitchFamily="34" charset="0"/>
+                          <a:ea typeface="Hanken Grotesk" pitchFamily="34" charset="-122"/>
+                          <a:cs typeface="Hanken Grotesk" pitchFamily="34" charset="-120"/>
+                        </a:rPr>
+                        <a:t>Constant</a:t>
+                      </a:r>
+                      <a:pPr indent="0" marL="0">
+                        <a:buNone/>
+                      </a:pPr>
+                      <a:endParaRPr lang="en-US" sz="950" dirty="0">
+                        <a:latin typeface="Hanken Grotesk" charset="0"/>
+                        <a:ea typeface="Hanken Grotesk" charset="0"/>
+                        <a:cs typeface="Hanken Grotesk" charset="0"/>
+                      </a:endParaRPr>
+                    </a:p>
+                    <a:p>
+                      <a:pPr indent="0" marL="0">
+                        <a:buNone/>
+                      </a:pPr>
+                      <a:r>
+                        <a:rPr lang="en-US" sz="850" i="1" dirty="0">
+                          <a:solidFill>
+                            <a:srgbClr val="8A96A3"/>
+                          </a:solidFill>
+                          <a:latin typeface="Hanken Grotesk" pitchFamily="34" charset="0"/>
+                          <a:ea typeface="Hanken Grotesk" pitchFamily="34" charset="-122"/>
+                          <a:cs typeface="Hanken Grotesk" pitchFamily="34" charset="-120"/>
+                        </a:rPr>
+                        <a:t>Constante</a:t>
+                      </a:r>
+                      <a:endParaRPr lang="en-US" sz="950" dirty="0">
+                        <a:latin typeface="Hanken Grotesk" charset="0"/>
+                        <a:ea typeface="Hanken Grotesk" charset="0"/>
+                        <a:cs typeface="Hanken Grotesk" charset="0"/>
+                      </a:endParaRPr>
+                    </a:p>
+                  </a:txBody>
+                  <a:tcPr marL="91440" marR="91440" marT="45720" marB="45720" anchor="ctr">
+                    <a:lnL w="9525" cap="flat" cmpd="sng" algn="ctr">
+                      <a:solidFill>
+                        <a:srgbClr val="D6DBDF"/>
+                      </a:solidFill>
+                      <a:prstDash val="solid"/>
+                      <a:round/>
+                      <a:headEnd type="none" w="med" len="med"/>
+                      <a:tailEnd type="none" w="med" len="med"/>
+                    </a:lnL>
+                    <a:lnR w="9525" cap="flat" cmpd="sng" algn="ctr">
+                      <a:solidFill>
+                        <a:srgbClr val="D6DBDF"/>
+                      </a:solidFill>
+                      <a:prstDash val="solid"/>
+                      <a:round/>
+                      <a:headEnd type="none" w="med" len="med"/>
+                      <a:tailEnd type="none" w="med" len="med"/>
+                    </a:lnR>
+                    <a:lnT w="9525" cap="flat" cmpd="sng" algn="ctr">
+                      <a:solidFill>
+                        <a:srgbClr val="D6DBDF"/>
+                      </a:solidFill>
+                      <a:prstDash val="solid"/>
+                      <a:round/>
+                      <a:headEnd type="none" w="med" len="med"/>
+                      <a:tailEnd type="none" w="med" len="med"/>
+                    </a:lnT>
+                    <a:lnB w="9525" cap="flat" cmpd="sng" algn="ctr">
+                      <a:solidFill>
+                        <a:srgbClr val="D6DBDF"/>
+                      </a:solidFill>
+                      <a:prstDash val="solid"/>
+                      <a:round/>
+                      <a:headEnd type="none" w="med" len="med"/>
+                      <a:tailEnd type="none" w="med" len="med"/>
+                    </a:lnB>
+                    <a:solidFill>
+                      <a:srgbClr val="F4F1E8"/>
+                    </a:solidFill>
+                  </a:tcPr>
+                </a:tc>
+                <a:tc>
+                  <a:txBody>
+                    <a:bodyPr/>
+                    <a:lstStyle/>
+                    <a:p>
+                      <a:pPr indent="0" marL="0">
+                        <a:buNone/>
+                      </a:pPr>
+                      <a:r>
+                        <a:rPr lang="en-US" sz="900" dirty="0">
+                          <a:solidFill>
+                            <a:srgbClr val="24323F"/>
+                          </a:solidFill>
+                          <a:latin typeface="Hanken Grotesk" pitchFamily="34" charset="0"/>
+                          <a:ea typeface="Hanken Grotesk" pitchFamily="34" charset="-122"/>
+                          <a:cs typeface="Hanken Grotesk" pitchFamily="34" charset="-120"/>
+                        </a:rPr>
+                        <a:t>A number on its own that does not change.</a:t>
+                      </a:r>
+                      <a:pPr indent="0" marL="0">
+                        <a:buNone/>
+                      </a:pPr>
+                      <a:endParaRPr lang="en-US" sz="900" dirty="0">
+                        <a:latin typeface="Hanken Grotesk" charset="0"/>
+                        <a:ea typeface="Hanken Grotesk" charset="0"/>
+                        <a:cs typeface="Hanken Grotesk" charset="0"/>
+                      </a:endParaRPr>
+                    </a:p>
+                    <a:p>
+                      <a:pPr indent="0" marL="0">
+                        <a:buNone/>
+                      </a:pPr>
+                      <a:r>
+                        <a:rPr lang="en-US" sz="850" i="1" dirty="0">
+                          <a:solidFill>
+                            <a:srgbClr val="8A96A3"/>
+                          </a:solidFill>
+                          <a:latin typeface="Hanken Grotesk" pitchFamily="34" charset="0"/>
+                          <a:ea typeface="Hanken Grotesk" pitchFamily="34" charset="-122"/>
+                          <a:cs typeface="Hanken Grotesk" pitchFamily="34" charset="-120"/>
+                        </a:rPr>
+                        <a:t>Un número solo que no cambia.</a:t>
+                      </a:r>
+                      <a:endParaRPr lang="en-US" sz="900" dirty="0">
+                        <a:latin typeface="Hanken Grotesk" charset="0"/>
+                        <a:ea typeface="Hanken Grotesk" charset="0"/>
+                        <a:cs typeface="Hanken Grotesk" charset="0"/>
+                      </a:endParaRPr>
+                    </a:p>
+                  </a:txBody>
+                  <a:tcPr marL="91440" marR="91440" marT="45720" marB="45720" anchor="ctr">
+                    <a:lnL w="9525" cap="flat" cmpd="sng" algn="ctr">
+                      <a:solidFill>
+                        <a:srgbClr val="D6DBDF"/>
+                      </a:solidFill>
+                      <a:prstDash val="solid"/>
+                      <a:round/>
+                      <a:headEnd type="none" w="med" len="med"/>
+                      <a:tailEnd type="none" w="med" len="med"/>
+                    </a:lnL>
+                    <a:lnR w="9525" cap="flat" cmpd="sng" algn="ctr">
+                      <a:solidFill>
+                        <a:srgbClr val="D6DBDF"/>
+                      </a:solidFill>
+                      <a:prstDash val="solid"/>
+                      <a:round/>
+                      <a:headEnd type="none" w="med" len="med"/>
+                      <a:tailEnd type="none" w="med" len="med"/>
+                    </a:lnR>
+                    <a:lnT w="9525" cap="flat" cmpd="sng" algn="ctr">
+                      <a:solidFill>
+                        <a:srgbClr val="D6DBDF"/>
+                      </a:solidFill>
+                      <a:prstDash val="solid"/>
+                      <a:round/>
+                      <a:headEnd type="none" w="med" len="med"/>
+                      <a:tailEnd type="none" w="med" len="med"/>
+                    </a:lnT>
+                    <a:lnB w="9525" cap="flat" cmpd="sng" algn="ctr">
+                      <a:solidFill>
+                        <a:srgbClr val="D6DBDF"/>
+                      </a:solidFill>
+                      <a:prstDash val="solid"/>
+                      <a:round/>
+                      <a:headEnd type="none" w="med" len="med"/>
+                      <a:tailEnd type="none" w="med" len="med"/>
+                    </a:lnB>
+                    <a:solidFill>
+                      <a:srgbClr val="F4F1E8"/>
+                    </a:solidFill>
+                  </a:tcPr>
+                </a:tc>
+                <a:tc>
+                  <a:txBody>
+                    <a:bodyPr/>
+                    <a:lstStyle/>
+                    <a:p>
+                      <a:pPr indent="0" marL="0">
+                        <a:buNone/>
+                      </a:pPr>
+                      <a:r>
+                        <a:rPr lang="en-US" sz="900" i="1" dirty="0">
+                          <a:solidFill>
+                            <a:srgbClr val="24323F"/>
+                          </a:solidFill>
+                          <a:latin typeface="Hanken Grotesk" pitchFamily="34" charset="0"/>
+                          <a:ea typeface="Hanken Grotesk" pitchFamily="34" charset="-122"/>
+                          <a:cs typeface="Hanken Grotesk" pitchFamily="34" charset="-120"/>
+                        </a:rPr>
+                        <a:t>In 3n + 7, the 7 never changes no matter what n is — like a flat fee that stays the same</a:t>
+                      </a:r>
+                      <a:endParaRPr lang="en-US" sz="900" dirty="0">
+                        <a:latin typeface="Hanken Grotesk" charset="0"/>
+                        <a:ea typeface="Hanken Grotesk" charset="0"/>
+                        <a:cs typeface="Hanken Grotesk" charset="0"/>
+                      </a:endParaRPr>
+                    </a:p>
+                  </a:txBody>
+                  <a:tcPr marL="91440" marR="91440" marT="45720" marB="45720" anchor="ctr">
+                    <a:lnL w="9525" cap="flat" cmpd="sng" algn="ctr">
+                      <a:solidFill>
+                        <a:srgbClr val="D6DBDF"/>
+                      </a:solidFill>
+                      <a:prstDash val="solid"/>
+                      <a:round/>
+                      <a:headEnd type="none" w="med" len="med"/>
+                      <a:tailEnd type="none" w="med" len="med"/>
+                    </a:lnL>
+                    <a:lnR w="9525" cap="flat" cmpd="sng" algn="ctr">
+                      <a:solidFill>
+                        <a:srgbClr val="D6DBDF"/>
+                      </a:solidFill>
+                      <a:prstDash val="solid"/>
+                      <a:round/>
+                      <a:headEnd type="none" w="med" len="med"/>
+                      <a:tailEnd type="none" w="med" len="med"/>
+                    </a:lnR>
+                    <a:lnT w="9525" cap="flat" cmpd="sng" algn="ctr">
+                      <a:solidFill>
+                        <a:srgbClr val="D6DBDF"/>
+                      </a:solidFill>
+                      <a:prstDash val="solid"/>
+                      <a:round/>
+                      <a:headEnd type="none" w="med" len="med"/>
+                      <a:tailEnd type="none" w="med" len="med"/>
+                    </a:lnT>
+                    <a:lnB w="9525" cap="flat" cmpd="sng" algn="ctr">
+                      <a:solidFill>
+                        <a:srgbClr val="D6DBDF"/>
+                      </a:solidFill>
+                      <a:prstDash val="solid"/>
+                      <a:round/>
+                      <a:headEnd type="none" w="med" len="med"/>
+                      <a:tailEnd type="none" w="med" len="med"/>
+                    </a:lnB>
+                    <a:solidFill>
+                      <a:srgbClr val="F4F1E8"/>
+                    </a:solidFill>
+                  </a:tcPr>
+                </a:tc>
+              </a:tr>
+              <a:tr h="457200">
+                <a:tc>
+                  <a:txBody>
+                    <a:bodyPr/>
+                    <a:lstStyle/>
+                    <a:p>
+                      <a:pPr indent="0" marL="0">
+                        <a:buNone/>
+                      </a:pPr>
+                      <a:r>
+                        <a:rPr lang="en-US" sz="950" b="1" dirty="0">
+                          <a:solidFill>
+                            <a:srgbClr val="17324D"/>
+                          </a:solidFill>
+                          <a:latin typeface="Hanken Grotesk" pitchFamily="34" charset="0"/>
+                          <a:ea typeface="Hanken Grotesk" pitchFamily="34" charset="-122"/>
+                          <a:cs typeface="Hanken Grotesk" pitchFamily="34" charset="-120"/>
+                        </a:rPr>
+                        <a:t>Like terms</a:t>
+                      </a:r>
+                      <a:pPr indent="0" marL="0">
+                        <a:buNone/>
+                      </a:pPr>
+                      <a:endParaRPr lang="en-US" sz="950" dirty="0">
+                        <a:latin typeface="Hanken Grotesk" charset="0"/>
+                        <a:ea typeface="Hanken Grotesk" charset="0"/>
+                        <a:cs typeface="Hanken Grotesk" charset="0"/>
+                      </a:endParaRPr>
+                    </a:p>
+                    <a:p>
+                      <a:pPr indent="0" marL="0">
+                        <a:buNone/>
+                      </a:pPr>
+                      <a:r>
+                        <a:rPr lang="en-US" sz="850" i="1" dirty="0">
+                          <a:solidFill>
+                            <a:srgbClr val="8A96A3"/>
+                          </a:solidFill>
+                          <a:latin typeface="Hanken Grotesk" pitchFamily="34" charset="0"/>
+                          <a:ea typeface="Hanken Grotesk" pitchFamily="34" charset="-122"/>
+                          <a:cs typeface="Hanken Grotesk" pitchFamily="34" charset="-120"/>
+                        </a:rPr>
+                        <a:t>Términos semejantes</a:t>
+                      </a:r>
+                      <a:endParaRPr lang="en-US" sz="950" dirty="0">
+                        <a:latin typeface="Hanken Grotesk" charset="0"/>
+                        <a:ea typeface="Hanken Grotesk" charset="0"/>
+                        <a:cs typeface="Hanken Grotesk" charset="0"/>
+                      </a:endParaRPr>
+                    </a:p>
+                  </a:txBody>
+                  <a:tcPr marL="91440" marR="91440" marT="45720" marB="45720" anchor="ctr">
+                    <a:lnL w="9525" cap="flat" cmpd="sng" algn="ctr">
+                      <a:solidFill>
+                        <a:srgbClr val="D6DBDF"/>
+                      </a:solidFill>
+                      <a:prstDash val="solid"/>
+                      <a:round/>
+                      <a:headEnd type="none" w="med" len="med"/>
+                      <a:tailEnd type="none" w="med" len="med"/>
+                    </a:lnL>
+                    <a:lnR w="9525" cap="flat" cmpd="sng" algn="ctr">
+                      <a:solidFill>
+                        <a:srgbClr val="D6DBDF"/>
+                      </a:solidFill>
+                      <a:prstDash val="solid"/>
+                      <a:round/>
+                      <a:headEnd type="none" w="med" len="med"/>
+                      <a:tailEnd type="none" w="med" len="med"/>
+                    </a:lnR>
+                    <a:lnT w="9525" cap="flat" cmpd="sng" algn="ctr">
+                      <a:solidFill>
+                        <a:srgbClr val="D6DBDF"/>
+                      </a:solidFill>
+                      <a:prstDash val="solid"/>
+                      <a:round/>
+                      <a:headEnd type="none" w="med" len="med"/>
+                      <a:tailEnd type="none" w="med" len="med"/>
+                    </a:lnT>
+                    <a:lnB w="9525" cap="flat" cmpd="sng" algn="ctr">
+                      <a:solidFill>
+                        <a:srgbClr val="D6DBDF"/>
+                      </a:solidFill>
+                      <a:prstDash val="solid"/>
+                      <a:round/>
+                      <a:headEnd type="none" w="med" len="med"/>
+                      <a:tailEnd type="none" w="med" len="med"/>
+                    </a:lnB>
+                    <a:solidFill>
+                      <a:srgbClr val="FFFFFF"/>
+                    </a:solidFill>
+                  </a:tcPr>
+                </a:tc>
+                <a:tc>
+                  <a:txBody>
+                    <a:bodyPr/>
+                    <a:lstStyle/>
+                    <a:p>
+                      <a:pPr indent="0" marL="0">
+                        <a:buNone/>
+                      </a:pPr>
+                      <a:r>
+                        <a:rPr lang="en-US" sz="900" dirty="0">
+                          <a:solidFill>
+                            <a:srgbClr val="24323F"/>
+                          </a:solidFill>
+                          <a:latin typeface="Hanken Grotesk" pitchFamily="34" charset="0"/>
+                          <a:ea typeface="Hanken Grotesk" pitchFamily="34" charset="-122"/>
+                          <a:cs typeface="Hanken Grotesk" pitchFamily="34" charset="-120"/>
+                        </a:rPr>
+                        <a:t>Terms with the same letter, like 2x and 5x.</a:t>
+                      </a:r>
+                      <a:pPr indent="0" marL="0">
+                        <a:buNone/>
+                      </a:pPr>
+                      <a:endParaRPr lang="en-US" sz="900" dirty="0">
+                        <a:latin typeface="Hanken Grotesk" charset="0"/>
+                        <a:ea typeface="Hanken Grotesk" charset="0"/>
+                        <a:cs typeface="Hanken Grotesk" charset="0"/>
+                      </a:endParaRPr>
+                    </a:p>
+                    <a:p>
+                      <a:pPr indent="0" marL="0">
+                        <a:buNone/>
+                      </a:pPr>
+                      <a:r>
+                        <a:rPr lang="en-US" sz="850" i="1" dirty="0">
+                          <a:solidFill>
+                            <a:srgbClr val="8A96A3"/>
+                          </a:solidFill>
+                          <a:latin typeface="Hanken Grotesk" pitchFamily="34" charset="0"/>
+                          <a:ea typeface="Hanken Grotesk" pitchFamily="34" charset="-122"/>
+                          <a:cs typeface="Hanken Grotesk" pitchFamily="34" charset="-120"/>
+                        </a:rPr>
+                        <a:t>Términos con la misma letra, como 2x y 5x.</a:t>
+                      </a:r>
+                      <a:endParaRPr lang="en-US" sz="900" dirty="0">
+                        <a:latin typeface="Hanken Grotesk" charset="0"/>
+                        <a:ea typeface="Hanken Grotesk" charset="0"/>
+                        <a:cs typeface="Hanken Grotesk" charset="0"/>
+                      </a:endParaRPr>
+                    </a:p>
+                  </a:txBody>
+                  <a:tcPr marL="91440" marR="91440" marT="45720" marB="45720" anchor="ctr">
+                    <a:lnL w="9525" cap="flat" cmpd="sng" algn="ctr">
+                      <a:solidFill>
+                        <a:srgbClr val="D6DBDF"/>
+                      </a:solidFill>
+                      <a:prstDash val="solid"/>
+                      <a:round/>
+                      <a:headEnd type="none" w="med" len="med"/>
+                      <a:tailEnd type="none" w="med" len="med"/>
+                    </a:lnL>
+                    <a:lnR w="9525" cap="flat" cmpd="sng" algn="ctr">
+                      <a:solidFill>
+                        <a:srgbClr val="D6DBDF"/>
+                      </a:solidFill>
+                      <a:prstDash val="solid"/>
+                      <a:round/>
+                      <a:headEnd type="none" w="med" len="med"/>
+                      <a:tailEnd type="none" w="med" len="med"/>
+                    </a:lnR>
+                    <a:lnT w="9525" cap="flat" cmpd="sng" algn="ctr">
+                      <a:solidFill>
+                        <a:srgbClr val="D6DBDF"/>
+                      </a:solidFill>
+                      <a:prstDash val="solid"/>
+                      <a:round/>
+                      <a:headEnd type="none" w="med" len="med"/>
+                      <a:tailEnd type="none" w="med" len="med"/>
+                    </a:lnT>
+                    <a:lnB w="9525" cap="flat" cmpd="sng" algn="ctr">
+                      <a:solidFill>
+                        <a:srgbClr val="D6DBDF"/>
+                      </a:solidFill>
+                      <a:prstDash val="solid"/>
+                      <a:round/>
+                      <a:headEnd type="none" w="med" len="med"/>
+                      <a:tailEnd type="none" w="med" len="med"/>
+                    </a:lnB>
+                    <a:solidFill>
+                      <a:srgbClr val="FFFFFF"/>
+                    </a:solidFill>
+                  </a:tcPr>
+                </a:tc>
+                <a:tc>
+                  <a:txBody>
+                    <a:bodyPr/>
+                    <a:lstStyle/>
+                    <a:p>
+                      <a:pPr indent="0" marL="0">
+                        <a:buNone/>
+                      </a:pPr>
+                      <a:r>
+                        <a:rPr lang="en-US" sz="900" i="1" dirty="0">
+                          <a:solidFill>
+                            <a:srgbClr val="24323F"/>
+                          </a:solidFill>
+                          <a:latin typeface="Hanken Grotesk" pitchFamily="34" charset="0"/>
+                          <a:ea typeface="Hanken Grotesk" pitchFamily="34" charset="-122"/>
+                          <a:cs typeface="Hanken Grotesk" pitchFamily="34" charset="-120"/>
+                        </a:rPr>
+                        <a:t>4x + 2x = 6x (like terms, same variable); but 4x + 2y cannot be combined (different variables)</a:t>
                       </a:r>
                       <a:endParaRPr lang="en-US" sz="900" dirty="0">
                         <a:latin typeface="Hanken Grotesk" charset="0"/>
@@ -20242,7 +20313,7 @@
                 <a:ea typeface="Outfit" pitchFamily="34" charset="-122"/>
                 <a:cs typeface="Outfit" pitchFamily="34" charset="-120"/>
               </a:rPr>
-              <a:t>Distributive Property — example vs. non-example:</a:t>
+              <a:t>Coefficient — example vs. non-example:</a:t>
             </a:r>
             <a:endParaRPr lang="en-US" sz="950" dirty="0"/>
           </a:p>
@@ -20329,7 +20400,7 @@
                 <a:ea typeface="Hanken Grotesk" pitchFamily="34" charset="-122"/>
                 <a:cs typeface="Hanken Grotesk" pitchFamily="34" charset="-120"/>
               </a:rPr>
-              <a:t>3(x + 4) = 3x + 12  </a:t>
+              <a:t>The 7 in 7n  </a:t>
             </a:r>
             <a:pPr indent="0" marL="0">
               <a:buNone/>
@@ -20343,7 +20414,7 @@
                 <a:ea typeface="Hanken Grotesk" pitchFamily="34" charset="-122"/>
                 <a:cs typeface="Hanken Grotesk" pitchFamily="34" charset="-120"/>
               </a:rPr>
-              <a:t>The 3 is multiplied by each term inside.</a:t>
+              <a:t>It is the number multiplied by the variable n.</a:t>
             </a:r>
             <a:endParaRPr lang="en-US" sz="900" dirty="0"/>
           </a:p>
@@ -20430,7 +20501,7 @@
                 <a:ea typeface="Hanken Grotesk" pitchFamily="34" charset="-122"/>
                 <a:cs typeface="Hanken Grotesk" pitchFamily="34" charset="-120"/>
               </a:rPr>
-              <a:t>3(x + 4) = 3x + 4  </a:t>
+              <a:t>The n in 7n  </a:t>
             </a:r>
             <a:pPr indent="0" marL="0">
               <a:buNone/>
@@ -20444,7 +20515,7 @@
                 <a:ea typeface="Hanken Grotesk" pitchFamily="34" charset="-122"/>
                 <a:cs typeface="Hanken Grotesk" pitchFamily="34" charset="-120"/>
               </a:rPr>
-              <a:t>The 3 must also multiply the 4.</a:t>
+              <a:t>n is the variable, not the coefficient.</a:t>
             </a:r>
             <a:endParaRPr lang="en-US" sz="900" dirty="0"/>
           </a:p>
@@ -20617,7 +20688,7 @@
                 <a:ea typeface="Outfit" pitchFamily="34" charset="-122"/>
                 <a:cs typeface="Outfit" pitchFamily="34" charset="-120"/>
               </a:rPr>
-              <a:t>6.AT.7</a:t>
+              <a:t>6.AT.6a</a:t>
             </a:r>
             <a:endParaRPr lang="en-US" sz="900" dirty="0"/>
           </a:p>
@@ -20836,7 +20907,7 @@
                 <a:ea typeface="Hanken Grotesk" pitchFamily="34" charset="-122"/>
                 <a:cs typeface="Hanken Grotesk" pitchFamily="34" charset="-120"/>
               </a:rPr>
-              <a:t>Reveal Math Grade 6  ·  Unit 6  ·  Lesson 6-5</a:t>
+              <a:t>Reveal Math Grade 6  ·  Unit 6  ·  Lesson 6-3</a:t>
             </a:r>
             <a:endParaRPr lang="en-US" sz="750" dirty="0"/>
           </a:p>
@@ -20991,7 +21062,7 @@
                 <a:ea typeface="Outfit" pitchFamily="34" charset="-122"/>
                 <a:cs typeface="Outfit" pitchFamily="34" charset="-120"/>
               </a:rPr>
-              <a:t>What is the distributive property?</a:t>
+              <a:t>How do we turn words into an expression?</a:t>
             </a:r>
             <a:endParaRPr lang="en-US" sz="1200" dirty="0"/>
           </a:p>
@@ -21089,7 +21160,7 @@
                 <a:ea typeface="Hanken Grotesk" pitchFamily="34" charset="-122"/>
                 <a:cs typeface="Hanken Grotesk" pitchFamily="34" charset="-120"/>
               </a:rPr>
-              <a:t>Let's expand 2(8 + 3). Where does the 2 go?</a:t>
+              <a:t>Let's write a simpler one: "$5 for each drink, d drinks."</a:t>
             </a:r>
             <a:endParaRPr lang="en-US" sz="1050" dirty="0"/>
           </a:p>
@@ -21187,7 +21258,7 @@
                 <a:ea typeface="Hanken Grotesk" pitchFamily="34" charset="-122"/>
                 <a:cs typeface="Hanken Grotesk" pitchFamily="34" charset="-120"/>
               </a:rPr>
-              <a:t>We multiply the 2 by each term: 2 × 8 + 2 × 3.</a:t>
+              <a:t>What does "$5 for each drink" tell us to do? Yes, multiply 5 by d.</a:t>
             </a:r>
             <a:endParaRPr lang="en-US" sz="1050" dirty="0"/>
           </a:p>
@@ -21285,7 +21356,7 @@
                 <a:ea typeface="Hanken Grotesk" pitchFamily="34" charset="-122"/>
                 <a:cs typeface="Hanken Grotesk" pitchFamily="34" charset="-120"/>
               </a:rPr>
-              <a:t>That is 16 + 6 = 22. So 2(8 + 3) = 22.</a:t>
+              <a:t>So the expression is 5d.</a:t>
             </a:r>
             <a:endParaRPr lang="en-US" sz="1050" dirty="0"/>
           </a:p>
@@ -21461,7 +21532,7 @@
                 <a:ea typeface="Hanken Grotesk" pitchFamily="34" charset="-122"/>
                 <a:cs typeface="Hanken Grotesk" pitchFamily="34" charset="-120"/>
               </a:rPr>
-              <a:t>Each bundle is a ticket ($15) and a snack ($5). For 3 people, why does 3(15 + 5) give the same $60 as 3 × 15 + 3 × 5?</a:t>
+              <a:t>Tickets cost $12 each with a flat $50 venue fee. If t is the number of tickets, how would you write an expression for total revenue, and which part changes with the crowd?</a:t>
             </a:r>
             <a:endParaRPr lang="en-US" sz="1000" dirty="0"/>
           </a:p>
@@ -21573,7 +21644,7 @@
                 <a:ea typeface="Hanken Grotesk" pitchFamily="34" charset="-122"/>
                 <a:cs typeface="Hanken Grotesk" pitchFamily="34" charset="-120"/>
               </a:rPr>
-              <a:t>The number outside the parentheses gets "shared" with every term inside.</a:t>
+              <a:t>Words like "each" or "per" mean multiply, and "plus" or "more than" mean add.</a:t>
             </a:r>
             <a:endParaRPr lang="en-US" sz="950" dirty="0"/>
           </a:p>
